--- a/slides/pptx/week05.pptx
+++ b/slides/pptx/week05.pptx
@@ -2192,7 +2192,7 @@
     <p:bg>
       <p:bgPr>
         <a:solidFill>
-          <a:srgbClr val="0E1726"/>
+          <a:srgbClr val="FFFFFF"/>
         </a:solidFill>
       </p:bgPr>
     </p:bg>
@@ -2210,38 +2210,9 @@
           <a:chExt cx="0" cy="0"/>
         </a:xfrm>
       </p:grpSpPr>
-      <p:sp>
-        <p:nvSpPr>
-          <p:cNvPr id="2" name="Shape 0"/>
-          <p:cNvSpPr/>
-          <p:nvPr/>
-        </p:nvSpPr>
-        <p:spPr>
-          <a:xfrm>
-            <a:off x="603504" y="411480"/>
-            <a:ext cx="1874520" cy="932688"/>
-          </a:xfrm>
-          <a:prstGeom prst="roundRect">
-            <a:avLst>
-              <a:gd name="adj" fmla="val 7843"/>
-            </a:avLst>
-          </a:prstGeom>
-          <a:solidFill>
-            <a:srgbClr val="FFFFFF"/>
-          </a:solidFill>
-          <a:ln/>
-          <a:effectLst>
-            <a:outerShdw sx="100000" sy="100000" kx="0" ky="0" algn="bl" rotWithShape="0" blurRad="101600" dist="38100" dir="5400000">
-              <a:srgbClr val="000000">
-                <a:alpha val="35000"/>
-              </a:srgbClr>
-            </a:outerShdw>
-          </a:effectLst>
-        </p:spPr>
-      </p:sp>
       <p:pic>
         <p:nvPicPr>
-          <p:cNvPr id="3" name="Image 0" descr="/Users/pop7/Library/CloudStorage/OneDrive-MonsterConnectCo.,Ltd/Lecture/KOSEN69 - software-security/slides/pptx/assets/logo-small.png">    </p:cNvPr>
+          <p:cNvPr id="2" name="Image 0" descr="/Users/pop7/Library/CloudStorage/OneDrive-MonsterConnectCo.,Ltd/Lecture/KOSEN69 - software-security/slides/pptx/assets/logo-small.png">    </p:cNvPr>
           <p:cNvPicPr>
             <a:picLocks noChangeAspect="1"/>
           </p:cNvPicPr>
@@ -2255,8 +2226,8 @@
         </p:blipFill>
         <p:spPr>
           <a:xfrm>
-            <a:off x="758952" y="566928"/>
-            <a:ext cx="1563624" cy="621792"/>
+            <a:off x="640080" y="502920"/>
+            <a:ext cx="1691640" cy="676656"/>
           </a:xfrm>
           <a:prstGeom prst="rect">
             <a:avLst/>
@@ -2265,7 +2236,7 @@
       </p:pic>
       <p:sp>
         <p:nvSpPr>
-          <p:cNvPr id="4" name="Text 1"/>
+          <p:cNvPr id="3" name="Text 0"/>
           <p:cNvSpPr/>
           <p:nvPr/>
         </p:nvSpPr>
@@ -2304,7 +2275,7 @@
       </p:sp>
       <p:sp>
         <p:nvSpPr>
-          <p:cNvPr id="5" name="Text 2"/>
+          <p:cNvPr id="4" name="Text 1"/>
           <p:cNvSpPr/>
           <p:nvPr/>
         </p:nvSpPr>
@@ -2332,7 +2303,7 @@
             <a:r>
               <a:rPr lang="en-US" sz="4000" b="1" dirty="0">
                 <a:solidFill>
-                  <a:srgbClr val="E6EDF3"/>
+                  <a:srgbClr val="1F2937"/>
                 </a:solidFill>
                 <a:latin typeface="Arial" pitchFamily="34" charset="0"/>
                 <a:ea typeface="Arial" pitchFamily="34" charset="-122"/>
@@ -2346,7 +2317,7 @@
       </p:sp>
       <p:sp>
         <p:nvSpPr>
-          <p:cNvPr id="6" name="Text 3"/>
+          <p:cNvPr id="5" name="Text 2"/>
           <p:cNvSpPr/>
           <p:nvPr/>
         </p:nvSpPr>
@@ -2371,7 +2342,7 @@
             <a:r>
               <a:rPr lang="en-US" sz="1400" dirty="0">
                 <a:solidFill>
-                  <a:srgbClr val="94A3B8"/>
+                  <a:srgbClr val="64748B"/>
                 </a:solidFill>
                 <a:latin typeface="Calibri" pitchFamily="34" charset="0"/>
                 <a:ea typeface="Calibri" pitchFamily="34" charset="-122"/>
@@ -2397,7 +2368,7 @@
     <p:bg>
       <p:bgPr>
         <a:solidFill>
-          <a:srgbClr val="0E1726"/>
+          <a:srgbClr val="FFFFFF"/>
         </a:solidFill>
       </p:bgPr>
     </p:bg>
@@ -2434,9 +2405,9 @@
           </a:solidFill>
           <a:ln/>
           <a:effectLst>
-            <a:outerShdw sx="100000" sy="100000" kx="0" ky="0" algn="bl" rotWithShape="0" blurRad="101600" dist="38100" dir="5400000">
+            <a:outerShdw sx="100000" sy="100000" kx="0" ky="0" algn="bl" rotWithShape="0" blurRad="76200" dist="25400" dir="5400000">
               <a:srgbClr val="000000">
-                <a:alpha val="35000"/>
+                <a:alpha val="12000"/>
               </a:srgbClr>
             </a:outerShdw>
           </a:effectLst>
@@ -2493,7 +2464,7 @@
             <a:r>
               <a:rPr lang="en-US" sz="2600" b="1" dirty="0">
                 <a:solidFill>
-                  <a:srgbClr val="E6EDF3"/>
+                  <a:srgbClr val="1F2937"/>
                 </a:solidFill>
                 <a:latin typeface="Arial" pitchFamily="34" charset="0"/>
                 <a:ea typeface="Arial" pitchFamily="34" charset="-122"/>
@@ -2522,13 +2493,13 @@
             </a:avLst>
           </a:prstGeom>
           <a:solidFill>
-            <a:srgbClr val="18243A"/>
+            <a:srgbClr val="F1F5F9"/>
           </a:solidFill>
           <a:ln/>
           <a:effectLst>
-            <a:outerShdw sx="100000" sy="100000" kx="0" ky="0" algn="bl" rotWithShape="0" blurRad="101600" dist="38100" dir="5400000">
+            <a:outerShdw sx="100000" sy="100000" kx="0" ky="0" algn="bl" rotWithShape="0" blurRad="76200" dist="25400" dir="5400000">
               <a:srgbClr val="000000">
-                <a:alpha val="35000"/>
+                <a:alpha val="12000"/>
               </a:srgbClr>
             </a:outerShdw>
           </a:effectLst>
@@ -2565,7 +2536,7 @@
             <a:r>
               <a:rPr lang="en-US" sz="1400" dirty="0">
                 <a:solidFill>
-                  <a:srgbClr val="E6EDF3"/>
+                  <a:srgbClr val="1F2937"/>
                 </a:solidFill>
                 <a:latin typeface="Calibri" pitchFamily="34" charset="0"/>
                 <a:ea typeface="Calibri" pitchFamily="34" charset="-122"/>
@@ -2586,7 +2557,7 @@
             <a:r>
               <a:rPr lang="en-US" sz="1400" dirty="0">
                 <a:solidFill>
-                  <a:srgbClr val="E6EDF3"/>
+                  <a:srgbClr val="1F2937"/>
                 </a:solidFill>
                 <a:latin typeface="Calibri" pitchFamily="34" charset="0"/>
                 <a:ea typeface="Calibri" pitchFamily="34" charset="-122"/>
@@ -2607,7 +2578,7 @@
             <a:r>
               <a:rPr lang="en-US" sz="1400" dirty="0">
                 <a:solidFill>
-                  <a:srgbClr val="E6EDF3"/>
+                  <a:srgbClr val="1F2937"/>
                 </a:solidFill>
                 <a:latin typeface="Calibri" pitchFamily="34" charset="0"/>
                 <a:ea typeface="Calibri" pitchFamily="34" charset="-122"/>
@@ -2646,7 +2617,7 @@
             <a:r>
               <a:rPr lang="en-US" sz="900" dirty="0">
                 <a:solidFill>
-                  <a:srgbClr val="94A3B8"/>
+                  <a:srgbClr val="64748B"/>
                 </a:solidFill>
                 <a:latin typeface="Calibri" pitchFamily="34" charset="0"/>
                 <a:ea typeface="Calibri" pitchFamily="34" charset="-122"/>
@@ -2658,38 +2629,9 @@
           </a:p>
         </p:txBody>
       </p:sp>
-      <p:sp>
-        <p:nvSpPr>
-          <p:cNvPr id="8" name="Shape 5"/>
-          <p:cNvSpPr/>
-          <p:nvPr/>
-        </p:nvSpPr>
-        <p:spPr>
-          <a:xfrm>
-            <a:off x="7772400" y="4590288"/>
-            <a:ext cx="969264" cy="475488"/>
-          </a:xfrm>
-          <a:prstGeom prst="roundRect">
-            <a:avLst>
-              <a:gd name="adj" fmla="val 11538"/>
-            </a:avLst>
-          </a:prstGeom>
-          <a:solidFill>
-            <a:srgbClr val="FFFFFF"/>
-          </a:solidFill>
-          <a:ln/>
-          <a:effectLst>
-            <a:outerShdw sx="100000" sy="100000" kx="0" ky="0" algn="bl" rotWithShape="0" blurRad="101600" dist="38100" dir="5400000">
-              <a:srgbClr val="000000">
-                <a:alpha val="35000"/>
-              </a:srgbClr>
-            </a:outerShdw>
-          </a:effectLst>
-        </p:spPr>
-      </p:sp>
       <p:pic>
         <p:nvPicPr>
-          <p:cNvPr id="9" name="Image 1" descr="/Users/pop7/Library/CloudStorage/OneDrive-MonsterConnectCo.,Ltd/Lecture/KOSEN69 - software-security/slides/pptx/assets/logo-small.png">    </p:cNvPr>
+          <p:cNvPr id="8" name="Image 1" descr="/Users/pop7/Library/CloudStorage/OneDrive-MonsterConnectCo.,Ltd/Lecture/KOSEN69 - software-security/slides/pptx/assets/logo-small.png">    </p:cNvPr>
           <p:cNvPicPr>
             <a:picLocks noChangeAspect="1"/>
           </p:cNvPicPr>
@@ -2703,7 +2645,7 @@
         </p:blipFill>
         <p:spPr>
           <a:xfrm>
-            <a:off x="7872984" y="4681728"/>
+            <a:off x="7882128" y="4700016"/>
             <a:ext cx="768096" cy="356616"/>
           </a:xfrm>
           <a:prstGeom prst="rect">
@@ -2725,7 +2667,7 @@
     <p:bg>
       <p:bgPr>
         <a:solidFill>
-          <a:srgbClr val="0E1726"/>
+          <a:srgbClr val="FFFFFF"/>
         </a:solidFill>
       </p:bgPr>
     </p:bg>
@@ -2762,9 +2704,9 @@
           </a:solidFill>
           <a:ln/>
           <a:effectLst>
-            <a:outerShdw sx="100000" sy="100000" kx="0" ky="0" algn="bl" rotWithShape="0" blurRad="101600" dist="38100" dir="5400000">
+            <a:outerShdw sx="100000" sy="100000" kx="0" ky="0" algn="bl" rotWithShape="0" blurRad="76200" dist="25400" dir="5400000">
               <a:srgbClr val="000000">
-                <a:alpha val="35000"/>
+                <a:alpha val="12000"/>
               </a:srgbClr>
             </a:outerShdw>
           </a:effectLst>
@@ -2821,7 +2763,7 @@
             <a:r>
               <a:rPr lang="en-US" sz="2600" b="1" dirty="0">
                 <a:solidFill>
-                  <a:srgbClr val="E6EDF3"/>
+                  <a:srgbClr val="1F2937"/>
                 </a:solidFill>
                 <a:latin typeface="Arial" pitchFamily="34" charset="0"/>
                 <a:ea typeface="Arial" pitchFamily="34" charset="-122"/>
@@ -2850,13 +2792,13 @@
             </a:avLst>
           </a:prstGeom>
           <a:solidFill>
-            <a:srgbClr val="18243A"/>
+            <a:srgbClr val="F1F5F9"/>
           </a:solidFill>
           <a:ln/>
           <a:effectLst>
-            <a:outerShdw sx="100000" sy="100000" kx="0" ky="0" algn="bl" rotWithShape="0" blurRad="101600" dist="38100" dir="5400000">
+            <a:outerShdw sx="100000" sy="100000" kx="0" ky="0" algn="bl" rotWithShape="0" blurRad="76200" dist="25400" dir="5400000">
               <a:srgbClr val="000000">
-                <a:alpha val="35000"/>
+                <a:alpha val="12000"/>
               </a:srgbClr>
             </a:outerShdw>
           </a:effectLst>
@@ -2893,7 +2835,7 @@
             <a:r>
               <a:rPr lang="en-US" sz="1400" dirty="0">
                 <a:solidFill>
-                  <a:srgbClr val="E6EDF3"/>
+                  <a:srgbClr val="1F2937"/>
                 </a:solidFill>
                 <a:latin typeface="Calibri" pitchFamily="34" charset="0"/>
                 <a:ea typeface="Calibri" pitchFamily="34" charset="-122"/>
@@ -2914,7 +2856,7 @@
             <a:r>
               <a:rPr lang="en-US" sz="1400" dirty="0">
                 <a:solidFill>
-                  <a:srgbClr val="E6EDF3"/>
+                  <a:srgbClr val="1F2937"/>
                 </a:solidFill>
                 <a:latin typeface="Calibri" pitchFamily="34" charset="0"/>
                 <a:ea typeface="Calibri" pitchFamily="34" charset="-122"/>
@@ -2935,7 +2877,7 @@
             <a:r>
               <a:rPr lang="en-US" sz="1400" dirty="0">
                 <a:solidFill>
-                  <a:srgbClr val="E6EDF3"/>
+                  <a:srgbClr val="1F2937"/>
                 </a:solidFill>
                 <a:latin typeface="Calibri" pitchFamily="34" charset="0"/>
                 <a:ea typeface="Calibri" pitchFamily="34" charset="-122"/>
@@ -2956,7 +2898,7 @@
             <a:r>
               <a:rPr lang="en-US" sz="1400" dirty="0">
                 <a:solidFill>
-                  <a:srgbClr val="E6EDF3"/>
+                  <a:srgbClr val="1F2937"/>
                 </a:solidFill>
                 <a:latin typeface="Calibri" pitchFamily="34" charset="0"/>
                 <a:ea typeface="Calibri" pitchFamily="34" charset="-122"/>
@@ -2995,7 +2937,7 @@
             <a:r>
               <a:rPr lang="en-US" sz="900" dirty="0">
                 <a:solidFill>
-                  <a:srgbClr val="94A3B8"/>
+                  <a:srgbClr val="64748B"/>
                 </a:solidFill>
                 <a:latin typeface="Calibri" pitchFamily="34" charset="0"/>
                 <a:ea typeface="Calibri" pitchFamily="34" charset="-122"/>
@@ -3007,38 +2949,9 @@
           </a:p>
         </p:txBody>
       </p:sp>
-      <p:sp>
-        <p:nvSpPr>
-          <p:cNvPr id="8" name="Shape 5"/>
-          <p:cNvSpPr/>
-          <p:nvPr/>
-        </p:nvSpPr>
-        <p:spPr>
-          <a:xfrm>
-            <a:off x="7772400" y="4590288"/>
-            <a:ext cx="969264" cy="475488"/>
-          </a:xfrm>
-          <a:prstGeom prst="roundRect">
-            <a:avLst>
-              <a:gd name="adj" fmla="val 11538"/>
-            </a:avLst>
-          </a:prstGeom>
-          <a:solidFill>
-            <a:srgbClr val="FFFFFF"/>
-          </a:solidFill>
-          <a:ln/>
-          <a:effectLst>
-            <a:outerShdw sx="100000" sy="100000" kx="0" ky="0" algn="bl" rotWithShape="0" blurRad="101600" dist="38100" dir="5400000">
-              <a:srgbClr val="000000">
-                <a:alpha val="35000"/>
-              </a:srgbClr>
-            </a:outerShdw>
-          </a:effectLst>
-        </p:spPr>
-      </p:sp>
       <p:pic>
         <p:nvPicPr>
-          <p:cNvPr id="9" name="Image 1" descr="/Users/pop7/Library/CloudStorage/OneDrive-MonsterConnectCo.,Ltd/Lecture/KOSEN69 - software-security/slides/pptx/assets/logo-small.png">    </p:cNvPr>
+          <p:cNvPr id="8" name="Image 1" descr="/Users/pop7/Library/CloudStorage/OneDrive-MonsterConnectCo.,Ltd/Lecture/KOSEN69 - software-security/slides/pptx/assets/logo-small.png">    </p:cNvPr>
           <p:cNvPicPr>
             <a:picLocks noChangeAspect="1"/>
           </p:cNvPicPr>
@@ -3052,7 +2965,7 @@
         </p:blipFill>
         <p:spPr>
           <a:xfrm>
-            <a:off x="7872984" y="4681728"/>
+            <a:off x="7882128" y="4700016"/>
             <a:ext cx="768096" cy="356616"/>
           </a:xfrm>
           <a:prstGeom prst="rect">
@@ -3074,7 +2987,7 @@
     <p:bg>
       <p:bgPr>
         <a:solidFill>
-          <a:srgbClr val="0E1726"/>
+          <a:srgbClr val="FFFFFF"/>
         </a:solidFill>
       </p:bgPr>
     </p:bg>
@@ -3111,9 +3024,9 @@
           </a:solidFill>
           <a:ln/>
           <a:effectLst>
-            <a:outerShdw sx="100000" sy="100000" kx="0" ky="0" algn="bl" rotWithShape="0" blurRad="101600" dist="38100" dir="5400000">
+            <a:outerShdw sx="100000" sy="100000" kx="0" ky="0" algn="bl" rotWithShape="0" blurRad="76200" dist="25400" dir="5400000">
               <a:srgbClr val="000000">
-                <a:alpha val="35000"/>
+                <a:alpha val="12000"/>
               </a:srgbClr>
             </a:outerShdw>
           </a:effectLst>
@@ -3170,7 +3083,7 @@
             <a:r>
               <a:rPr lang="en-US" sz="2600" b="1" dirty="0">
                 <a:solidFill>
-                  <a:srgbClr val="E6EDF3"/>
+                  <a:srgbClr val="1F2937"/>
                 </a:solidFill>
                 <a:latin typeface="Arial" pitchFamily="34" charset="0"/>
                 <a:ea typeface="Arial" pitchFamily="34" charset="-122"/>
@@ -3209,7 +3122,7 @@
             <a:r>
               <a:rPr lang="en-US" sz="1400" dirty="0">
                 <a:solidFill>
-                  <a:srgbClr val="E6EDF3"/>
+                  <a:srgbClr val="1F2937"/>
                 </a:solidFill>
                 <a:latin typeface="Calibri" pitchFamily="34" charset="0"/>
                 <a:ea typeface="Calibri" pitchFamily="34" charset="-122"/>
@@ -3238,13 +3151,13 @@
             </a:avLst>
           </a:prstGeom>
           <a:solidFill>
-            <a:srgbClr val="18243A"/>
+            <a:srgbClr val="F1F5F9"/>
           </a:solidFill>
           <a:ln/>
           <a:effectLst>
-            <a:outerShdw sx="100000" sy="100000" kx="0" ky="0" algn="bl" rotWithShape="0" blurRad="101600" dist="38100" dir="5400000">
+            <a:outerShdw sx="100000" sy="100000" kx="0" ky="0" algn="bl" rotWithShape="0" blurRad="76200" dist="25400" dir="5400000">
               <a:srgbClr val="000000">
-                <a:alpha val="35000"/>
+                <a:alpha val="12000"/>
               </a:srgbClr>
             </a:outerShdw>
           </a:effectLst>
@@ -3281,7 +3194,7 @@
             <a:r>
               <a:rPr lang="en-US" sz="1400" dirty="0">
                 <a:solidFill>
-                  <a:srgbClr val="E6EDF3"/>
+                  <a:srgbClr val="1F2937"/>
                 </a:solidFill>
                 <a:latin typeface="Calibri" pitchFamily="34" charset="0"/>
                 <a:ea typeface="Calibri" pitchFamily="34" charset="-122"/>
@@ -3302,13 +3215,13 @@
             <a:r>
               <a:rPr lang="en-US" sz="1400" dirty="0">
                 <a:solidFill>
-                  <a:srgbClr val="E6EDF3"/>
+                  <a:srgbClr val="1F2937"/>
                 </a:solidFill>
                 <a:latin typeface="Calibri" pitchFamily="34" charset="0"/>
                 <a:ea typeface="Calibri" pitchFamily="34" charset="-122"/>
                 <a:cs typeface="Calibri" pitchFamily="34" charset="-120"/>
               </a:rPr>
-              <a:t>Round 2: deploy a CSP + escaping that blocks *every* submitted payload</a:t>
+              <a:t>Round 2: deploy a CSP + escaping that blocks every submitted payload</a:t>
             </a:r>
             <a:endParaRPr lang="en-US" sz="1400" dirty="0"/>
           </a:p>
@@ -3323,7 +3236,7 @@
             <a:r>
               <a:rPr lang="en-US" sz="1400" dirty="0">
                 <a:solidFill>
-                  <a:srgbClr val="E6EDF3"/>
+                  <a:srgbClr val="1F2937"/>
                 </a:solidFill>
                 <a:latin typeface="Calibri" pitchFamily="34" charset="0"/>
                 <a:ea typeface="Calibri" pitchFamily="34" charset="-122"/>
@@ -3362,7 +3275,7 @@
             <a:r>
               <a:rPr lang="en-US" sz="900" dirty="0">
                 <a:solidFill>
-                  <a:srgbClr val="94A3B8"/>
+                  <a:srgbClr val="64748B"/>
                 </a:solidFill>
                 <a:latin typeface="Calibri" pitchFamily="34" charset="0"/>
                 <a:ea typeface="Calibri" pitchFamily="34" charset="-122"/>
@@ -3374,38 +3287,9 @@
           </a:p>
         </p:txBody>
       </p:sp>
-      <p:sp>
-        <p:nvSpPr>
-          <p:cNvPr id="9" name="Shape 6"/>
-          <p:cNvSpPr/>
-          <p:nvPr/>
-        </p:nvSpPr>
-        <p:spPr>
-          <a:xfrm>
-            <a:off x="7772400" y="4590288"/>
-            <a:ext cx="969264" cy="475488"/>
-          </a:xfrm>
-          <a:prstGeom prst="roundRect">
-            <a:avLst>
-              <a:gd name="adj" fmla="val 11538"/>
-            </a:avLst>
-          </a:prstGeom>
-          <a:solidFill>
-            <a:srgbClr val="FFFFFF"/>
-          </a:solidFill>
-          <a:ln/>
-          <a:effectLst>
-            <a:outerShdw sx="100000" sy="100000" kx="0" ky="0" algn="bl" rotWithShape="0" blurRad="101600" dist="38100" dir="5400000">
-              <a:srgbClr val="000000">
-                <a:alpha val="35000"/>
-              </a:srgbClr>
-            </a:outerShdw>
-          </a:effectLst>
-        </p:spPr>
-      </p:sp>
       <p:pic>
         <p:nvPicPr>
-          <p:cNvPr id="10" name="Image 1" descr="/Users/pop7/Library/CloudStorage/OneDrive-MonsterConnectCo.,Ltd/Lecture/KOSEN69 - software-security/slides/pptx/assets/logo-small.png">    </p:cNvPr>
+          <p:cNvPr id="9" name="Image 1" descr="/Users/pop7/Library/CloudStorage/OneDrive-MonsterConnectCo.,Ltd/Lecture/KOSEN69 - software-security/slides/pptx/assets/logo-small.png">    </p:cNvPr>
           <p:cNvPicPr>
             <a:picLocks noChangeAspect="1"/>
           </p:cNvPicPr>
@@ -3419,7 +3303,7 @@
         </p:blipFill>
         <p:spPr>
           <a:xfrm>
-            <a:off x="7872984" y="4681728"/>
+            <a:off x="7882128" y="4700016"/>
             <a:ext cx="768096" cy="356616"/>
           </a:xfrm>
           <a:prstGeom prst="rect">
@@ -3441,7 +3325,7 @@
     <p:bg>
       <p:bgPr>
         <a:solidFill>
-          <a:srgbClr val="0E1726"/>
+          <a:srgbClr val="FFFFFF"/>
         </a:solidFill>
       </p:bgPr>
     </p:bg>
@@ -3478,9 +3362,9 @@
           </a:solidFill>
           <a:ln/>
           <a:effectLst>
-            <a:outerShdw sx="100000" sy="100000" kx="0" ky="0" algn="bl" rotWithShape="0" blurRad="101600" dist="38100" dir="5400000">
+            <a:outerShdw sx="100000" sy="100000" kx="0" ky="0" algn="bl" rotWithShape="0" blurRad="76200" dist="25400" dir="5400000">
               <a:srgbClr val="000000">
-                <a:alpha val="35000"/>
+                <a:alpha val="12000"/>
               </a:srgbClr>
             </a:outerShdw>
           </a:effectLst>
@@ -3537,7 +3421,7 @@
             <a:r>
               <a:rPr lang="en-US" sz="2600" b="1" dirty="0">
                 <a:solidFill>
-                  <a:srgbClr val="E6EDF3"/>
+                  <a:srgbClr val="1F2937"/>
                 </a:solidFill>
                 <a:latin typeface="Arial" pitchFamily="34" charset="0"/>
                 <a:ea typeface="Arial" pitchFamily="34" charset="-122"/>
@@ -3635,7 +3519,7 @@
             <a:r>
               <a:rPr lang="en-US" sz="1350" dirty="0">
                 <a:solidFill>
-                  <a:srgbClr val="E6EDF3"/>
+                  <a:srgbClr val="1F2937"/>
                 </a:solidFill>
                 <a:latin typeface="Calibri" pitchFamily="34" charset="0"/>
                 <a:ea typeface="Calibri" pitchFamily="34" charset="-122"/>
@@ -3733,7 +3617,7 @@
             <a:r>
               <a:rPr lang="en-US" sz="1350" dirty="0">
                 <a:solidFill>
-                  <a:srgbClr val="E6EDF3"/>
+                  <a:srgbClr val="1F2937"/>
                 </a:solidFill>
                 <a:latin typeface="Calibri" pitchFamily="34" charset="0"/>
                 <a:ea typeface="Calibri" pitchFamily="34" charset="-122"/>
@@ -3831,7 +3715,7 @@
             <a:r>
               <a:rPr lang="en-US" sz="1350" dirty="0">
                 <a:solidFill>
-                  <a:srgbClr val="E6EDF3"/>
+                  <a:srgbClr val="1F2937"/>
                 </a:solidFill>
                 <a:latin typeface="Calibri" pitchFamily="34" charset="0"/>
                 <a:ea typeface="Calibri" pitchFamily="34" charset="-122"/>
@@ -3929,7 +3813,7 @@
             <a:r>
               <a:rPr lang="en-US" sz="1350" dirty="0">
                 <a:solidFill>
-                  <a:srgbClr val="E6EDF3"/>
+                  <a:srgbClr val="1F2937"/>
                 </a:solidFill>
                 <a:latin typeface="Calibri" pitchFamily="34" charset="0"/>
                 <a:ea typeface="Calibri" pitchFamily="34" charset="-122"/>
@@ -3968,7 +3852,7 @@
             <a:r>
               <a:rPr lang="en-US" sz="900" dirty="0">
                 <a:solidFill>
-                  <a:srgbClr val="94A3B8"/>
+                  <a:srgbClr val="64748B"/>
                 </a:solidFill>
                 <a:latin typeface="Calibri" pitchFamily="34" charset="0"/>
                 <a:ea typeface="Calibri" pitchFamily="34" charset="-122"/>
@@ -3980,38 +3864,9 @@
           </a:p>
         </p:txBody>
       </p:sp>
-      <p:sp>
-        <p:nvSpPr>
-          <p:cNvPr id="18" name="Shape 15"/>
-          <p:cNvSpPr/>
-          <p:nvPr/>
-        </p:nvSpPr>
-        <p:spPr>
-          <a:xfrm>
-            <a:off x="7772400" y="4590288"/>
-            <a:ext cx="969264" cy="475488"/>
-          </a:xfrm>
-          <a:prstGeom prst="roundRect">
-            <a:avLst>
-              <a:gd name="adj" fmla="val 11538"/>
-            </a:avLst>
-          </a:prstGeom>
-          <a:solidFill>
-            <a:srgbClr val="FFFFFF"/>
-          </a:solidFill>
-          <a:ln/>
-          <a:effectLst>
-            <a:outerShdw sx="100000" sy="100000" kx="0" ky="0" algn="bl" rotWithShape="0" blurRad="101600" dist="38100" dir="5400000">
-              <a:srgbClr val="000000">
-                <a:alpha val="35000"/>
-              </a:srgbClr>
-            </a:outerShdw>
-          </a:effectLst>
-        </p:spPr>
-      </p:sp>
       <p:pic>
         <p:nvPicPr>
-          <p:cNvPr id="19" name="Image 1" descr="/Users/pop7/Library/CloudStorage/OneDrive-MonsterConnectCo.,Ltd/Lecture/KOSEN69 - software-security/slides/pptx/assets/logo-small.png">    </p:cNvPr>
+          <p:cNvPr id="18" name="Image 1" descr="/Users/pop7/Library/CloudStorage/OneDrive-MonsterConnectCo.,Ltd/Lecture/KOSEN69 - software-security/slides/pptx/assets/logo-small.png">    </p:cNvPr>
           <p:cNvPicPr>
             <a:picLocks noChangeAspect="1"/>
           </p:cNvPicPr>
@@ -4025,7 +3880,7 @@
         </p:blipFill>
         <p:spPr>
           <a:xfrm>
-            <a:off x="7872984" y="4681728"/>
+            <a:off x="7882128" y="4700016"/>
             <a:ext cx="768096" cy="356616"/>
           </a:xfrm>
           <a:prstGeom prst="rect">
@@ -4047,7 +3902,7 @@
     <p:bg>
       <p:bgPr>
         <a:solidFill>
-          <a:srgbClr val="0E1726"/>
+          <a:srgbClr val="FFFFFF"/>
         </a:solidFill>
       </p:bgPr>
     </p:bg>
@@ -4084,9 +3939,9 @@
           </a:solidFill>
           <a:ln/>
           <a:effectLst>
-            <a:outerShdw sx="100000" sy="100000" kx="0" ky="0" algn="bl" rotWithShape="0" blurRad="101600" dist="38100" dir="5400000">
+            <a:outerShdw sx="100000" sy="100000" kx="0" ky="0" algn="bl" rotWithShape="0" blurRad="76200" dist="25400" dir="5400000">
               <a:srgbClr val="000000">
-                <a:alpha val="35000"/>
+                <a:alpha val="12000"/>
               </a:srgbClr>
             </a:outerShdw>
           </a:effectLst>
@@ -4143,7 +3998,7 @@
             <a:r>
               <a:rPr lang="en-US" sz="2600" b="1" dirty="0">
                 <a:solidFill>
-                  <a:srgbClr val="E6EDF3"/>
+                  <a:srgbClr val="1F2937"/>
                 </a:solidFill>
                 <a:latin typeface="Arial" pitchFamily="34" charset="0"/>
                 <a:ea typeface="Arial" pitchFamily="34" charset="-122"/>
@@ -4172,13 +4027,13 @@
             </a:avLst>
           </a:prstGeom>
           <a:solidFill>
-            <a:srgbClr val="18243A"/>
+            <a:srgbClr val="F1F5F9"/>
           </a:solidFill>
           <a:ln/>
           <a:effectLst>
-            <a:outerShdw sx="100000" sy="100000" kx="0" ky="0" algn="bl" rotWithShape="0" blurRad="101600" dist="38100" dir="5400000">
+            <a:outerShdw sx="100000" sy="100000" kx="0" ky="0" algn="bl" rotWithShape="0" blurRad="76200" dist="25400" dir="5400000">
               <a:srgbClr val="000000">
-                <a:alpha val="35000"/>
+                <a:alpha val="12000"/>
               </a:srgbClr>
             </a:outerShdw>
           </a:effectLst>
@@ -4215,7 +4070,7 @@
             <a:r>
               <a:rPr lang="en-US" sz="1400" dirty="0">
                 <a:solidFill>
-                  <a:srgbClr val="E6EDF3"/>
+                  <a:srgbClr val="1F2937"/>
                 </a:solidFill>
                 <a:latin typeface="Calibri" pitchFamily="34" charset="0"/>
                 <a:ea typeface="Calibri" pitchFamily="34" charset="-122"/>
@@ -4236,7 +4091,7 @@
             <a:r>
               <a:rPr lang="en-US" sz="1400" dirty="0">
                 <a:solidFill>
-                  <a:srgbClr val="E6EDF3"/>
+                  <a:srgbClr val="1F2937"/>
                 </a:solidFill>
                 <a:latin typeface="Calibri" pitchFamily="34" charset="0"/>
                 <a:ea typeface="Calibri" pitchFamily="34" charset="-122"/>
@@ -4257,7 +4112,7 @@
             <a:r>
               <a:rPr lang="en-US" sz="1400" dirty="0">
                 <a:solidFill>
-                  <a:srgbClr val="E6EDF3"/>
+                  <a:srgbClr val="1F2937"/>
                 </a:solidFill>
                 <a:latin typeface="Calibri" pitchFamily="34" charset="0"/>
                 <a:ea typeface="Calibri" pitchFamily="34" charset="-122"/>
@@ -4296,7 +4151,7 @@
             <a:r>
               <a:rPr lang="en-US" sz="900" dirty="0">
                 <a:solidFill>
-                  <a:srgbClr val="94A3B8"/>
+                  <a:srgbClr val="64748B"/>
                 </a:solidFill>
                 <a:latin typeface="Calibri" pitchFamily="34" charset="0"/>
                 <a:ea typeface="Calibri" pitchFamily="34" charset="-122"/>
@@ -4308,38 +4163,9 @@
           </a:p>
         </p:txBody>
       </p:sp>
-      <p:sp>
-        <p:nvSpPr>
-          <p:cNvPr id="8" name="Shape 5"/>
-          <p:cNvSpPr/>
-          <p:nvPr/>
-        </p:nvSpPr>
-        <p:spPr>
-          <a:xfrm>
-            <a:off x="7772400" y="4590288"/>
-            <a:ext cx="969264" cy="475488"/>
-          </a:xfrm>
-          <a:prstGeom prst="roundRect">
-            <a:avLst>
-              <a:gd name="adj" fmla="val 11538"/>
-            </a:avLst>
-          </a:prstGeom>
-          <a:solidFill>
-            <a:srgbClr val="FFFFFF"/>
-          </a:solidFill>
-          <a:ln/>
-          <a:effectLst>
-            <a:outerShdw sx="100000" sy="100000" kx="0" ky="0" algn="bl" rotWithShape="0" blurRad="101600" dist="38100" dir="5400000">
-              <a:srgbClr val="000000">
-                <a:alpha val="35000"/>
-              </a:srgbClr>
-            </a:outerShdw>
-          </a:effectLst>
-        </p:spPr>
-      </p:sp>
       <p:pic>
         <p:nvPicPr>
-          <p:cNvPr id="9" name="Image 1" descr="/Users/pop7/Library/CloudStorage/OneDrive-MonsterConnectCo.,Ltd/Lecture/KOSEN69 - software-security/slides/pptx/assets/logo-small.png">    </p:cNvPr>
+          <p:cNvPr id="8" name="Image 1" descr="/Users/pop7/Library/CloudStorage/OneDrive-MonsterConnectCo.,Ltd/Lecture/KOSEN69 - software-security/slides/pptx/assets/logo-small.png">    </p:cNvPr>
           <p:cNvPicPr>
             <a:picLocks noChangeAspect="1"/>
           </p:cNvPicPr>
@@ -4353,7 +4179,7 @@
         </p:blipFill>
         <p:spPr>
           <a:xfrm>
-            <a:off x="7872984" y="4681728"/>
+            <a:off x="7882128" y="4700016"/>
             <a:ext cx="768096" cy="356616"/>
           </a:xfrm>
           <a:prstGeom prst="rect">
@@ -4375,7 +4201,7 @@
     <p:bg>
       <p:bgPr>
         <a:solidFill>
-          <a:srgbClr val="0E1726"/>
+          <a:srgbClr val="FFFFFF"/>
         </a:solidFill>
       </p:bgPr>
     </p:bg>
@@ -4412,9 +4238,9 @@
           </a:solidFill>
           <a:ln/>
           <a:effectLst>
-            <a:outerShdw sx="100000" sy="100000" kx="0" ky="0" algn="bl" rotWithShape="0" blurRad="101600" dist="38100" dir="5400000">
+            <a:outerShdw sx="100000" sy="100000" kx="0" ky="0" algn="bl" rotWithShape="0" blurRad="76200" dist="25400" dir="5400000">
               <a:srgbClr val="000000">
-                <a:alpha val="35000"/>
+                <a:alpha val="12000"/>
               </a:srgbClr>
             </a:outerShdw>
           </a:effectLst>
@@ -4471,7 +4297,7 @@
             <a:r>
               <a:rPr lang="en-US" sz="2600" b="1" dirty="0">
                 <a:solidFill>
-                  <a:srgbClr val="E6EDF3"/>
+                  <a:srgbClr val="1F2937"/>
                 </a:solidFill>
                 <a:latin typeface="Arial" pitchFamily="34" charset="0"/>
                 <a:ea typeface="Arial" pitchFamily="34" charset="-122"/>
@@ -4500,13 +4326,13 @@
             </a:avLst>
           </a:prstGeom>
           <a:solidFill>
-            <a:srgbClr val="18243A"/>
+            <a:srgbClr val="F1F5F9"/>
           </a:solidFill>
           <a:ln/>
           <a:effectLst>
-            <a:outerShdw sx="100000" sy="100000" kx="0" ky="0" algn="bl" rotWithShape="0" blurRad="101600" dist="38100" dir="5400000">
+            <a:outerShdw sx="100000" sy="100000" kx="0" ky="0" algn="bl" rotWithShape="0" blurRad="76200" dist="25400" dir="5400000">
               <a:srgbClr val="000000">
-                <a:alpha val="35000"/>
+                <a:alpha val="12000"/>
               </a:srgbClr>
             </a:outerShdw>
           </a:effectLst>
@@ -4543,7 +4369,7 @@
             <a:r>
               <a:rPr lang="en-US" sz="1400" dirty="0">
                 <a:solidFill>
-                  <a:srgbClr val="E6EDF3"/>
+                  <a:srgbClr val="1F2937"/>
                 </a:solidFill>
                 <a:latin typeface="Calibri" pitchFamily="34" charset="0"/>
                 <a:ea typeface="Calibri" pitchFamily="34" charset="-122"/>
@@ -4564,7 +4390,7 @@
             <a:r>
               <a:rPr lang="en-US" sz="1400" dirty="0">
                 <a:solidFill>
-                  <a:srgbClr val="E6EDF3"/>
+                  <a:srgbClr val="1F2937"/>
                 </a:solidFill>
                 <a:latin typeface="Calibri" pitchFamily="34" charset="0"/>
                 <a:ea typeface="Calibri" pitchFamily="34" charset="-122"/>
@@ -4585,7 +4411,7 @@
             <a:r>
               <a:rPr lang="en-US" sz="1400" dirty="0">
                 <a:solidFill>
-                  <a:srgbClr val="E6EDF3"/>
+                  <a:srgbClr val="1F2937"/>
                 </a:solidFill>
                 <a:latin typeface="Calibri" pitchFamily="34" charset="0"/>
                 <a:ea typeface="Calibri" pitchFamily="34" charset="-122"/>
@@ -4624,7 +4450,7 @@
             <a:r>
               <a:rPr lang="en-US" sz="900" dirty="0">
                 <a:solidFill>
-                  <a:srgbClr val="94A3B8"/>
+                  <a:srgbClr val="64748B"/>
                 </a:solidFill>
                 <a:latin typeface="Calibri" pitchFamily="34" charset="0"/>
                 <a:ea typeface="Calibri" pitchFamily="34" charset="-122"/>
@@ -4636,38 +4462,9 @@
           </a:p>
         </p:txBody>
       </p:sp>
-      <p:sp>
-        <p:nvSpPr>
-          <p:cNvPr id="8" name="Shape 5"/>
-          <p:cNvSpPr/>
-          <p:nvPr/>
-        </p:nvSpPr>
-        <p:spPr>
-          <a:xfrm>
-            <a:off x="7772400" y="4590288"/>
-            <a:ext cx="969264" cy="475488"/>
-          </a:xfrm>
-          <a:prstGeom prst="roundRect">
-            <a:avLst>
-              <a:gd name="adj" fmla="val 11538"/>
-            </a:avLst>
-          </a:prstGeom>
-          <a:solidFill>
-            <a:srgbClr val="FFFFFF"/>
-          </a:solidFill>
-          <a:ln/>
-          <a:effectLst>
-            <a:outerShdw sx="100000" sy="100000" kx="0" ky="0" algn="bl" rotWithShape="0" blurRad="101600" dist="38100" dir="5400000">
-              <a:srgbClr val="000000">
-                <a:alpha val="35000"/>
-              </a:srgbClr>
-            </a:outerShdw>
-          </a:effectLst>
-        </p:spPr>
-      </p:sp>
       <p:pic>
         <p:nvPicPr>
-          <p:cNvPr id="9" name="Image 1" descr="/Users/pop7/Library/CloudStorage/OneDrive-MonsterConnectCo.,Ltd/Lecture/KOSEN69 - software-security/slides/pptx/assets/logo-small.png">    </p:cNvPr>
+          <p:cNvPr id="8" name="Image 1" descr="/Users/pop7/Library/CloudStorage/OneDrive-MonsterConnectCo.,Ltd/Lecture/KOSEN69 - software-security/slides/pptx/assets/logo-small.png">    </p:cNvPr>
           <p:cNvPicPr>
             <a:picLocks noChangeAspect="1"/>
           </p:cNvPicPr>
@@ -4681,7 +4478,7 @@
         </p:blipFill>
         <p:spPr>
           <a:xfrm>
-            <a:off x="7872984" y="4681728"/>
+            <a:off x="7882128" y="4700016"/>
             <a:ext cx="768096" cy="356616"/>
           </a:xfrm>
           <a:prstGeom prst="rect">
@@ -4703,7 +4500,7 @@
     <p:bg>
       <p:bgPr>
         <a:solidFill>
-          <a:srgbClr val="0E1726"/>
+          <a:srgbClr val="FFFFFF"/>
         </a:solidFill>
       </p:bgPr>
     </p:bg>
@@ -4748,7 +4545,7 @@
             <a:r>
               <a:rPr lang="en-US" sz="4600" b="1" dirty="0">
                 <a:solidFill>
-                  <a:srgbClr val="E6EDF3"/>
+                  <a:srgbClr val="1F2937"/>
                 </a:solidFill>
                 <a:latin typeface="Arial" pitchFamily="34" charset="0"/>
                 <a:ea typeface="Arial" pitchFamily="34" charset="-122"/>
@@ -4799,38 +4596,9 @@
           </a:p>
         </p:txBody>
       </p:sp>
-      <p:sp>
-        <p:nvSpPr>
-          <p:cNvPr id="4" name="Shape 2"/>
-          <p:cNvSpPr/>
-          <p:nvPr/>
-        </p:nvSpPr>
-        <p:spPr>
-          <a:xfrm>
-            <a:off x="7772400" y="4590288"/>
-            <a:ext cx="969264" cy="475488"/>
-          </a:xfrm>
-          <a:prstGeom prst="roundRect">
-            <a:avLst>
-              <a:gd name="adj" fmla="val 11538"/>
-            </a:avLst>
-          </a:prstGeom>
-          <a:solidFill>
-            <a:srgbClr val="FFFFFF"/>
-          </a:solidFill>
-          <a:ln/>
-          <a:effectLst>
-            <a:outerShdw sx="100000" sy="100000" kx="0" ky="0" algn="bl" rotWithShape="0" blurRad="101600" dist="38100" dir="5400000">
-              <a:srgbClr val="000000">
-                <a:alpha val="35000"/>
-              </a:srgbClr>
-            </a:outerShdw>
-          </a:effectLst>
-        </p:spPr>
-      </p:sp>
       <p:pic>
         <p:nvPicPr>
-          <p:cNvPr id="5" name="Image 0" descr="/Users/pop7/Library/CloudStorage/OneDrive-MonsterConnectCo.,Ltd/Lecture/KOSEN69 - software-security/slides/pptx/assets/logo-small.png">    </p:cNvPr>
+          <p:cNvPr id="4" name="Image 0" descr="/Users/pop7/Library/CloudStorage/OneDrive-MonsterConnectCo.,Ltd/Lecture/KOSEN69 - software-security/slides/pptx/assets/logo-small.png">    </p:cNvPr>
           <p:cNvPicPr>
             <a:picLocks noChangeAspect="1"/>
           </p:cNvPicPr>
@@ -4844,7 +4612,7 @@
         </p:blipFill>
         <p:spPr>
           <a:xfrm>
-            <a:off x="7872984" y="4681728"/>
+            <a:off x="7882128" y="4700016"/>
             <a:ext cx="768096" cy="356616"/>
           </a:xfrm>
           <a:prstGeom prst="rect">
@@ -4866,7 +4634,7 @@
     <p:bg>
       <p:bgPr>
         <a:solidFill>
-          <a:srgbClr val="0E1726"/>
+          <a:srgbClr val="FFFFFF"/>
         </a:solidFill>
       </p:bgPr>
     </p:bg>
@@ -4903,9 +4671,9 @@
           </a:solidFill>
           <a:ln/>
           <a:effectLst>
-            <a:outerShdw sx="100000" sy="100000" kx="0" ky="0" algn="bl" rotWithShape="0" blurRad="101600" dist="38100" dir="5400000">
+            <a:outerShdw sx="100000" sy="100000" kx="0" ky="0" algn="bl" rotWithShape="0" blurRad="76200" dist="25400" dir="5400000">
               <a:srgbClr val="000000">
-                <a:alpha val="35000"/>
+                <a:alpha val="12000"/>
               </a:srgbClr>
             </a:outerShdw>
           </a:effectLst>
@@ -4962,7 +4730,7 @@
             <a:r>
               <a:rPr lang="en-US" sz="2600" b="1" dirty="0">
                 <a:solidFill>
-                  <a:srgbClr val="E6EDF3"/>
+                  <a:srgbClr val="1F2937"/>
                 </a:solidFill>
                 <a:latin typeface="Arial" pitchFamily="34" charset="0"/>
                 <a:ea typeface="Arial" pitchFamily="34" charset="-122"/>
@@ -4991,13 +4759,13 @@
             </a:avLst>
           </a:prstGeom>
           <a:solidFill>
-            <a:srgbClr val="18243A"/>
+            <a:srgbClr val="F1F5F9"/>
           </a:solidFill>
           <a:ln/>
           <a:effectLst>
-            <a:outerShdw sx="100000" sy="100000" kx="0" ky="0" algn="bl" rotWithShape="0" blurRad="101600" dist="38100" dir="5400000">
+            <a:outerShdw sx="100000" sy="100000" kx="0" ky="0" algn="bl" rotWithShape="0" blurRad="76200" dist="25400" dir="5400000">
               <a:srgbClr val="000000">
-                <a:alpha val="35000"/>
+                <a:alpha val="12000"/>
               </a:srgbClr>
             </a:outerShdw>
           </a:effectLst>
@@ -5034,7 +4802,7 @@
             <a:r>
               <a:rPr lang="en-US" sz="1400" dirty="0">
                 <a:solidFill>
-                  <a:srgbClr val="E6EDF3"/>
+                  <a:srgbClr val="1F2937"/>
                 </a:solidFill>
                 <a:latin typeface="Calibri" pitchFamily="34" charset="0"/>
                 <a:ea typeface="Calibri" pitchFamily="34" charset="-122"/>
@@ -5055,7 +4823,7 @@
             <a:r>
               <a:rPr lang="en-US" sz="1400" dirty="0">
                 <a:solidFill>
-                  <a:srgbClr val="E6EDF3"/>
+                  <a:srgbClr val="1F2937"/>
                 </a:solidFill>
                 <a:latin typeface="Calibri" pitchFamily="34" charset="0"/>
                 <a:ea typeface="Calibri" pitchFamily="34" charset="-122"/>
@@ -5076,7 +4844,7 @@
             <a:r>
               <a:rPr lang="en-US" sz="1400" dirty="0">
                 <a:solidFill>
-                  <a:srgbClr val="E6EDF3"/>
+                  <a:srgbClr val="1F2937"/>
                 </a:solidFill>
                 <a:latin typeface="Calibri" pitchFamily="34" charset="0"/>
                 <a:ea typeface="Calibri" pitchFamily="34" charset="-122"/>
@@ -5097,7 +4865,7 @@
             <a:r>
               <a:rPr lang="en-US" sz="1400" dirty="0">
                 <a:solidFill>
-                  <a:srgbClr val="E6EDF3"/>
+                  <a:srgbClr val="1F2937"/>
                 </a:solidFill>
                 <a:latin typeface="Calibri" pitchFamily="34" charset="0"/>
                 <a:ea typeface="Calibri" pitchFamily="34" charset="-122"/>
@@ -5118,7 +4886,7 @@
             <a:r>
               <a:rPr lang="en-US" sz="1400" dirty="0">
                 <a:solidFill>
-                  <a:srgbClr val="E6EDF3"/>
+                  <a:srgbClr val="1F2937"/>
                 </a:solidFill>
                 <a:latin typeface="Calibri" pitchFamily="34" charset="0"/>
                 <a:ea typeface="Calibri" pitchFamily="34" charset="-122"/>
@@ -5157,7 +4925,7 @@
             <a:r>
               <a:rPr lang="en-US" sz="900" dirty="0">
                 <a:solidFill>
-                  <a:srgbClr val="94A3B8"/>
+                  <a:srgbClr val="64748B"/>
                 </a:solidFill>
                 <a:latin typeface="Calibri" pitchFamily="34" charset="0"/>
                 <a:ea typeface="Calibri" pitchFamily="34" charset="-122"/>
@@ -5169,38 +4937,9 @@
           </a:p>
         </p:txBody>
       </p:sp>
-      <p:sp>
-        <p:nvSpPr>
-          <p:cNvPr id="8" name="Shape 5"/>
-          <p:cNvSpPr/>
-          <p:nvPr/>
-        </p:nvSpPr>
-        <p:spPr>
-          <a:xfrm>
-            <a:off x="7772400" y="4590288"/>
-            <a:ext cx="969264" cy="475488"/>
-          </a:xfrm>
-          <a:prstGeom prst="roundRect">
-            <a:avLst>
-              <a:gd name="adj" fmla="val 11538"/>
-            </a:avLst>
-          </a:prstGeom>
-          <a:solidFill>
-            <a:srgbClr val="FFFFFF"/>
-          </a:solidFill>
-          <a:ln/>
-          <a:effectLst>
-            <a:outerShdw sx="100000" sy="100000" kx="0" ky="0" algn="bl" rotWithShape="0" blurRad="101600" dist="38100" dir="5400000">
-              <a:srgbClr val="000000">
-                <a:alpha val="35000"/>
-              </a:srgbClr>
-            </a:outerShdw>
-          </a:effectLst>
-        </p:spPr>
-      </p:sp>
       <p:pic>
         <p:nvPicPr>
-          <p:cNvPr id="9" name="Image 1" descr="/Users/pop7/Library/CloudStorage/OneDrive-MonsterConnectCo.,Ltd/Lecture/KOSEN69 - software-security/slides/pptx/assets/logo-small.png">    </p:cNvPr>
+          <p:cNvPr id="8" name="Image 1" descr="/Users/pop7/Library/CloudStorage/OneDrive-MonsterConnectCo.,Ltd/Lecture/KOSEN69 - software-security/slides/pptx/assets/logo-small.png">    </p:cNvPr>
           <p:cNvPicPr>
             <a:picLocks noChangeAspect="1"/>
           </p:cNvPicPr>
@@ -5214,7 +4953,7 @@
         </p:blipFill>
         <p:spPr>
           <a:xfrm>
-            <a:off x="7872984" y="4681728"/>
+            <a:off x="7882128" y="4700016"/>
             <a:ext cx="768096" cy="356616"/>
           </a:xfrm>
           <a:prstGeom prst="rect">
@@ -5236,7 +4975,7 @@
     <p:bg>
       <p:bgPr>
         <a:solidFill>
-          <a:srgbClr val="0E1726"/>
+          <a:srgbClr val="FFFFFF"/>
         </a:solidFill>
       </p:bgPr>
     </p:bg>
@@ -5273,9 +5012,9 @@
           </a:solidFill>
           <a:ln/>
           <a:effectLst>
-            <a:outerShdw sx="100000" sy="100000" kx="0" ky="0" algn="bl" rotWithShape="0" blurRad="101600" dist="38100" dir="5400000">
+            <a:outerShdw sx="100000" sy="100000" kx="0" ky="0" algn="bl" rotWithShape="0" blurRad="76200" dist="25400" dir="5400000">
               <a:srgbClr val="000000">
-                <a:alpha val="35000"/>
+                <a:alpha val="12000"/>
               </a:srgbClr>
             </a:outerShdw>
           </a:effectLst>
@@ -5332,7 +5071,7 @@
             <a:r>
               <a:rPr lang="en-US" sz="2600" b="1" dirty="0">
                 <a:solidFill>
-                  <a:srgbClr val="E6EDF3"/>
+                  <a:srgbClr val="1F2937"/>
                 </a:solidFill>
                 <a:latin typeface="Arial" pitchFamily="34" charset="0"/>
                 <a:ea typeface="Arial" pitchFamily="34" charset="-122"/>
@@ -5361,13 +5100,13 @@
             </a:avLst>
           </a:prstGeom>
           <a:solidFill>
-            <a:srgbClr val="18243A"/>
+            <a:srgbClr val="F1F5F9"/>
           </a:solidFill>
           <a:ln/>
           <a:effectLst>
-            <a:outerShdw sx="100000" sy="100000" kx="0" ky="0" algn="bl" rotWithShape="0" blurRad="101600" dist="38100" dir="5400000">
+            <a:outerShdw sx="100000" sy="100000" kx="0" ky="0" algn="bl" rotWithShape="0" blurRad="76200" dist="25400" dir="5400000">
               <a:srgbClr val="000000">
-                <a:alpha val="35000"/>
+                <a:alpha val="12000"/>
               </a:srgbClr>
             </a:outerShdw>
           </a:effectLst>
@@ -5404,7 +5143,7 @@
             <a:r>
               <a:rPr lang="en-US" sz="1400" dirty="0">
                 <a:solidFill>
-                  <a:srgbClr val="E6EDF3"/>
+                  <a:srgbClr val="1F2937"/>
                 </a:solidFill>
                 <a:latin typeface="Calibri" pitchFamily="34" charset="0"/>
                 <a:ea typeface="Calibri" pitchFamily="34" charset="-122"/>
@@ -5425,7 +5164,7 @@
             <a:r>
               <a:rPr lang="en-US" sz="1400" dirty="0">
                 <a:solidFill>
-                  <a:srgbClr val="E6EDF3"/>
+                  <a:srgbClr val="1F2937"/>
                 </a:solidFill>
                 <a:latin typeface="Calibri" pitchFamily="34" charset="0"/>
                 <a:ea typeface="Calibri" pitchFamily="34" charset="-122"/>
@@ -5446,7 +5185,7 @@
             <a:r>
               <a:rPr lang="en-US" sz="1400" dirty="0">
                 <a:solidFill>
-                  <a:srgbClr val="E6EDF3"/>
+                  <a:srgbClr val="1F2937"/>
                 </a:solidFill>
                 <a:latin typeface="Calibri" pitchFamily="34" charset="0"/>
                 <a:ea typeface="Calibri" pitchFamily="34" charset="-122"/>
@@ -5485,7 +5224,7 @@
             <a:r>
               <a:rPr lang="en-US" sz="900" dirty="0">
                 <a:solidFill>
-                  <a:srgbClr val="94A3B8"/>
+                  <a:srgbClr val="64748B"/>
                 </a:solidFill>
                 <a:latin typeface="Calibri" pitchFamily="34" charset="0"/>
                 <a:ea typeface="Calibri" pitchFamily="34" charset="-122"/>
@@ -5497,38 +5236,9 @@
           </a:p>
         </p:txBody>
       </p:sp>
-      <p:sp>
-        <p:nvSpPr>
-          <p:cNvPr id="8" name="Shape 5"/>
-          <p:cNvSpPr/>
-          <p:nvPr/>
-        </p:nvSpPr>
-        <p:spPr>
-          <a:xfrm>
-            <a:off x="7772400" y="4590288"/>
-            <a:ext cx="969264" cy="475488"/>
-          </a:xfrm>
-          <a:prstGeom prst="roundRect">
-            <a:avLst>
-              <a:gd name="adj" fmla="val 11538"/>
-            </a:avLst>
-          </a:prstGeom>
-          <a:solidFill>
-            <a:srgbClr val="FFFFFF"/>
-          </a:solidFill>
-          <a:ln/>
-          <a:effectLst>
-            <a:outerShdw sx="100000" sy="100000" kx="0" ky="0" algn="bl" rotWithShape="0" blurRad="101600" dist="38100" dir="5400000">
-              <a:srgbClr val="000000">
-                <a:alpha val="35000"/>
-              </a:srgbClr>
-            </a:outerShdw>
-          </a:effectLst>
-        </p:spPr>
-      </p:sp>
       <p:pic>
         <p:nvPicPr>
-          <p:cNvPr id="9" name="Image 1" descr="/Users/pop7/Library/CloudStorage/OneDrive-MonsterConnectCo.,Ltd/Lecture/KOSEN69 - software-security/slides/pptx/assets/logo-small.png">    </p:cNvPr>
+          <p:cNvPr id="8" name="Image 1" descr="/Users/pop7/Library/CloudStorage/OneDrive-MonsterConnectCo.,Ltd/Lecture/KOSEN69 - software-security/slides/pptx/assets/logo-small.png">    </p:cNvPr>
           <p:cNvPicPr>
             <a:picLocks noChangeAspect="1"/>
           </p:cNvPicPr>
@@ -5542,7 +5252,7 @@
         </p:blipFill>
         <p:spPr>
           <a:xfrm>
-            <a:off x="7872984" y="4681728"/>
+            <a:off x="7882128" y="4700016"/>
             <a:ext cx="768096" cy="356616"/>
           </a:xfrm>
           <a:prstGeom prst="rect">
@@ -5564,7 +5274,7 @@
     <p:bg>
       <p:bgPr>
         <a:solidFill>
-          <a:srgbClr val="0E1726"/>
+          <a:srgbClr val="FFFFFF"/>
         </a:solidFill>
       </p:bgPr>
     </p:bg>
@@ -5601,9 +5311,9 @@
           </a:solidFill>
           <a:ln/>
           <a:effectLst>
-            <a:outerShdw sx="100000" sy="100000" kx="0" ky="0" algn="bl" rotWithShape="0" blurRad="101600" dist="38100" dir="5400000">
+            <a:outerShdw sx="100000" sy="100000" kx="0" ky="0" algn="bl" rotWithShape="0" blurRad="76200" dist="25400" dir="5400000">
               <a:srgbClr val="000000">
-                <a:alpha val="35000"/>
+                <a:alpha val="12000"/>
               </a:srgbClr>
             </a:outerShdw>
           </a:effectLst>
@@ -5660,7 +5370,7 @@
             <a:r>
               <a:rPr lang="en-US" sz="2600" b="1" dirty="0">
                 <a:solidFill>
-                  <a:srgbClr val="E6EDF3"/>
+                  <a:srgbClr val="1F2937"/>
                 </a:solidFill>
                 <a:latin typeface="Arial" pitchFamily="34" charset="0"/>
                 <a:ea typeface="Arial" pitchFamily="34" charset="-122"/>
@@ -5689,13 +5399,13 @@
             </a:avLst>
           </a:prstGeom>
           <a:solidFill>
-            <a:srgbClr val="18243A"/>
+            <a:srgbClr val="F1F5F9"/>
           </a:solidFill>
           <a:ln/>
           <a:effectLst>
-            <a:outerShdw sx="100000" sy="100000" kx="0" ky="0" algn="bl" rotWithShape="0" blurRad="101600" dist="38100" dir="5400000">
+            <a:outerShdw sx="100000" sy="100000" kx="0" ky="0" algn="bl" rotWithShape="0" blurRad="76200" dist="25400" dir="5400000">
               <a:srgbClr val="000000">
-                <a:alpha val="35000"/>
+                <a:alpha val="12000"/>
               </a:srgbClr>
             </a:outerShdw>
           </a:effectLst>
@@ -5732,7 +5442,7 @@
             <a:r>
               <a:rPr lang="en-US" sz="1400" dirty="0">
                 <a:solidFill>
-                  <a:srgbClr val="E6EDF3"/>
+                  <a:srgbClr val="1F2937"/>
                 </a:solidFill>
                 <a:latin typeface="Calibri" pitchFamily="34" charset="0"/>
                 <a:ea typeface="Calibri" pitchFamily="34" charset="-122"/>
@@ -5753,7 +5463,7 @@
             <a:r>
               <a:rPr lang="en-US" sz="1400" dirty="0">
                 <a:solidFill>
-                  <a:srgbClr val="E6EDF3"/>
+                  <a:srgbClr val="1F2937"/>
                 </a:solidFill>
                 <a:latin typeface="Calibri" pitchFamily="34" charset="0"/>
                 <a:ea typeface="Calibri" pitchFamily="34" charset="-122"/>
@@ -5774,7 +5484,7 @@
             <a:r>
               <a:rPr lang="en-US" sz="1400" dirty="0">
                 <a:solidFill>
-                  <a:srgbClr val="E6EDF3"/>
+                  <a:srgbClr val="1F2937"/>
                 </a:solidFill>
                 <a:latin typeface="Calibri" pitchFamily="34" charset="0"/>
                 <a:ea typeface="Calibri" pitchFamily="34" charset="-122"/>
@@ -5813,7 +5523,7 @@
             <a:r>
               <a:rPr lang="en-US" sz="900" dirty="0">
                 <a:solidFill>
-                  <a:srgbClr val="94A3B8"/>
+                  <a:srgbClr val="64748B"/>
                 </a:solidFill>
                 <a:latin typeface="Calibri" pitchFamily="34" charset="0"/>
                 <a:ea typeface="Calibri" pitchFamily="34" charset="-122"/>
@@ -5825,38 +5535,9 @@
           </a:p>
         </p:txBody>
       </p:sp>
-      <p:sp>
-        <p:nvSpPr>
-          <p:cNvPr id="8" name="Shape 5"/>
-          <p:cNvSpPr/>
-          <p:nvPr/>
-        </p:nvSpPr>
-        <p:spPr>
-          <a:xfrm>
-            <a:off x="7772400" y="4590288"/>
-            <a:ext cx="969264" cy="475488"/>
-          </a:xfrm>
-          <a:prstGeom prst="roundRect">
-            <a:avLst>
-              <a:gd name="adj" fmla="val 11538"/>
-            </a:avLst>
-          </a:prstGeom>
-          <a:solidFill>
-            <a:srgbClr val="FFFFFF"/>
-          </a:solidFill>
-          <a:ln/>
-          <a:effectLst>
-            <a:outerShdw sx="100000" sy="100000" kx="0" ky="0" algn="bl" rotWithShape="0" blurRad="101600" dist="38100" dir="5400000">
-              <a:srgbClr val="000000">
-                <a:alpha val="35000"/>
-              </a:srgbClr>
-            </a:outerShdw>
-          </a:effectLst>
-        </p:spPr>
-      </p:sp>
       <p:pic>
         <p:nvPicPr>
-          <p:cNvPr id="9" name="Image 1" descr="/Users/pop7/Library/CloudStorage/OneDrive-MonsterConnectCo.,Ltd/Lecture/KOSEN69 - software-security/slides/pptx/assets/logo-small.png">    </p:cNvPr>
+          <p:cNvPr id="8" name="Image 1" descr="/Users/pop7/Library/CloudStorage/OneDrive-MonsterConnectCo.,Ltd/Lecture/KOSEN69 - software-security/slides/pptx/assets/logo-small.png">    </p:cNvPr>
           <p:cNvPicPr>
             <a:picLocks noChangeAspect="1"/>
           </p:cNvPicPr>
@@ -5870,7 +5551,7 @@
         </p:blipFill>
         <p:spPr>
           <a:xfrm>
-            <a:off x="7872984" y="4681728"/>
+            <a:off x="7882128" y="4700016"/>
             <a:ext cx="768096" cy="356616"/>
           </a:xfrm>
           <a:prstGeom prst="rect">
@@ -5892,7 +5573,7 @@
     <p:bg>
       <p:bgPr>
         <a:solidFill>
-          <a:srgbClr val="0E1726"/>
+          <a:srgbClr val="FFFFFF"/>
         </a:solidFill>
       </p:bgPr>
     </p:bg>
@@ -5929,9 +5610,9 @@
           </a:solidFill>
           <a:ln/>
           <a:effectLst>
-            <a:outerShdw sx="100000" sy="100000" kx="0" ky="0" algn="bl" rotWithShape="0" blurRad="101600" dist="38100" dir="5400000">
+            <a:outerShdw sx="100000" sy="100000" kx="0" ky="0" algn="bl" rotWithShape="0" blurRad="76200" dist="25400" dir="5400000">
               <a:srgbClr val="000000">
-                <a:alpha val="35000"/>
+                <a:alpha val="12000"/>
               </a:srgbClr>
             </a:outerShdw>
           </a:effectLst>
@@ -5988,7 +5669,7 @@
             <a:r>
               <a:rPr lang="en-US" sz="2600" b="1" dirty="0">
                 <a:solidFill>
-                  <a:srgbClr val="E6EDF3"/>
+                  <a:srgbClr val="1F2937"/>
                 </a:solidFill>
                 <a:latin typeface="Arial" pitchFamily="34" charset="0"/>
                 <a:ea typeface="Arial" pitchFamily="34" charset="-122"/>
@@ -6017,7 +5698,7 @@
             </a:avLst>
           </a:prstGeom>
           <a:solidFill>
-            <a:srgbClr val="1E2B45"/>
+            <a:srgbClr val="E8EDF3"/>
           </a:solidFill>
           <a:ln/>
         </p:spPr>
@@ -6078,13 +5759,13 @@
             </a:avLst>
           </a:prstGeom>
           <a:solidFill>
-            <a:srgbClr val="18243A"/>
+            <a:srgbClr val="F1F5F9"/>
           </a:solidFill>
           <a:ln/>
           <a:effectLst>
-            <a:outerShdw sx="100000" sy="100000" kx="0" ky="0" algn="bl" rotWithShape="0" blurRad="101600" dist="38100" dir="5400000">
+            <a:outerShdw sx="100000" sy="100000" kx="0" ky="0" algn="bl" rotWithShape="0" blurRad="76200" dist="25400" dir="5400000">
               <a:srgbClr val="000000">
-                <a:alpha val="35000"/>
+                <a:alpha val="12000"/>
               </a:srgbClr>
             </a:outerShdw>
           </a:effectLst>
@@ -6121,7 +5802,7 @@
             <a:r>
               <a:rPr lang="en-US" sz="1400" dirty="0">
                 <a:solidFill>
-                  <a:srgbClr val="E6EDF3"/>
+                  <a:srgbClr val="1F2937"/>
                 </a:solidFill>
                 <a:latin typeface="Calibri" pitchFamily="34" charset="0"/>
                 <a:ea typeface="Calibri" pitchFamily="34" charset="-122"/>
@@ -6142,7 +5823,7 @@
             <a:r>
               <a:rPr lang="en-US" sz="1400" dirty="0">
                 <a:solidFill>
-                  <a:srgbClr val="E6EDF3"/>
+                  <a:srgbClr val="1F2937"/>
                 </a:solidFill>
                 <a:latin typeface="Calibri" pitchFamily="34" charset="0"/>
                 <a:ea typeface="Calibri" pitchFamily="34" charset="-122"/>
@@ -6181,7 +5862,7 @@
             <a:r>
               <a:rPr lang="en-US" sz="900" dirty="0">
                 <a:solidFill>
-                  <a:srgbClr val="94A3B8"/>
+                  <a:srgbClr val="64748B"/>
                 </a:solidFill>
                 <a:latin typeface="Calibri" pitchFamily="34" charset="0"/>
                 <a:ea typeface="Calibri" pitchFamily="34" charset="-122"/>
@@ -6193,38 +5874,9 @@
           </a:p>
         </p:txBody>
       </p:sp>
-      <p:sp>
-        <p:nvSpPr>
-          <p:cNvPr id="10" name="Shape 7"/>
-          <p:cNvSpPr/>
-          <p:nvPr/>
-        </p:nvSpPr>
-        <p:spPr>
-          <a:xfrm>
-            <a:off x="7772400" y="4590288"/>
-            <a:ext cx="969264" cy="475488"/>
-          </a:xfrm>
-          <a:prstGeom prst="roundRect">
-            <a:avLst>
-              <a:gd name="adj" fmla="val 11538"/>
-            </a:avLst>
-          </a:prstGeom>
-          <a:solidFill>
-            <a:srgbClr val="FFFFFF"/>
-          </a:solidFill>
-          <a:ln/>
-          <a:effectLst>
-            <a:outerShdw sx="100000" sy="100000" kx="0" ky="0" algn="bl" rotWithShape="0" blurRad="101600" dist="38100" dir="5400000">
-              <a:srgbClr val="000000">
-                <a:alpha val="35000"/>
-              </a:srgbClr>
-            </a:outerShdw>
-          </a:effectLst>
-        </p:spPr>
-      </p:sp>
       <p:pic>
         <p:nvPicPr>
-          <p:cNvPr id="11" name="Image 1" descr="/Users/pop7/Library/CloudStorage/OneDrive-MonsterConnectCo.,Ltd/Lecture/KOSEN69 - software-security/slides/pptx/assets/logo-small.png">    </p:cNvPr>
+          <p:cNvPr id="10" name="Image 1" descr="/Users/pop7/Library/CloudStorage/OneDrive-MonsterConnectCo.,Ltd/Lecture/KOSEN69 - software-security/slides/pptx/assets/logo-small.png">    </p:cNvPr>
           <p:cNvPicPr>
             <a:picLocks noChangeAspect="1"/>
           </p:cNvPicPr>
@@ -6238,7 +5890,7 @@
         </p:blipFill>
         <p:spPr>
           <a:xfrm>
-            <a:off x="7872984" y="4681728"/>
+            <a:off x="7882128" y="4700016"/>
             <a:ext cx="768096" cy="356616"/>
           </a:xfrm>
           <a:prstGeom prst="rect">
@@ -6260,7 +5912,7 @@
     <p:bg>
       <p:bgPr>
         <a:solidFill>
-          <a:srgbClr val="0E1726"/>
+          <a:srgbClr val="FFFFFF"/>
         </a:solidFill>
       </p:bgPr>
     </p:bg>
@@ -6297,9 +5949,9 @@
           </a:solidFill>
           <a:ln/>
           <a:effectLst>
-            <a:outerShdw sx="100000" sy="100000" kx="0" ky="0" algn="bl" rotWithShape="0" blurRad="101600" dist="38100" dir="5400000">
+            <a:outerShdw sx="100000" sy="100000" kx="0" ky="0" algn="bl" rotWithShape="0" blurRad="76200" dist="25400" dir="5400000">
               <a:srgbClr val="000000">
-                <a:alpha val="35000"/>
+                <a:alpha val="12000"/>
               </a:srgbClr>
             </a:outerShdw>
           </a:effectLst>
@@ -6356,7 +6008,7 @@
             <a:r>
               <a:rPr lang="en-US" sz="2600" b="1" dirty="0">
                 <a:solidFill>
-                  <a:srgbClr val="E6EDF3"/>
+                  <a:srgbClr val="1F2937"/>
                 </a:solidFill>
                 <a:latin typeface="Arial" pitchFamily="34" charset="0"/>
                 <a:ea typeface="Arial" pitchFamily="34" charset="-122"/>
@@ -6417,7 +6069,7 @@
                   <a:tcPr marL="76200" marR="76200" marT="38100" marB="38100" anchor="ctr">
                     <a:lnL w="12700" cap="flat" cmpd="sng" algn="ctr">
                       <a:solidFill>
-                        <a:srgbClr val="0E1726"/>
+                        <a:srgbClr val="FFFFFF"/>
                       </a:solidFill>
                       <a:prstDash val="solid"/>
                       <a:round/>
@@ -6426,7 +6078,7 @@
                     </a:lnL>
                     <a:lnR w="12700" cap="flat" cmpd="sng" algn="ctr">
                       <a:solidFill>
-                        <a:srgbClr val="0E1726"/>
+                        <a:srgbClr val="FFFFFF"/>
                       </a:solidFill>
                       <a:prstDash val="solid"/>
                       <a:round/>
@@ -6435,7 +6087,7 @@
                     </a:lnR>
                     <a:lnT w="12700" cap="flat" cmpd="sng" algn="ctr">
                       <a:solidFill>
-                        <a:srgbClr val="0E1726"/>
+                        <a:srgbClr val="FFFFFF"/>
                       </a:solidFill>
                       <a:prstDash val="solid"/>
                       <a:round/>
@@ -6444,7 +6096,7 @@
                     </a:lnT>
                     <a:lnB w="12700" cap="flat" cmpd="sng" algn="ctr">
                       <a:solidFill>
-                        <a:srgbClr val="0E1726"/>
+                        <a:srgbClr val="FFFFFF"/>
                       </a:solidFill>
                       <a:prstDash val="solid"/>
                       <a:round/>
@@ -6478,7 +6130,7 @@
                   <a:tcPr marL="76200" marR="76200" marT="38100" marB="38100" anchor="ctr">
                     <a:lnL w="12700" cap="flat" cmpd="sng" algn="ctr">
                       <a:solidFill>
-                        <a:srgbClr val="0E1726"/>
+                        <a:srgbClr val="FFFFFF"/>
                       </a:solidFill>
                       <a:prstDash val="solid"/>
                       <a:round/>
@@ -6487,7 +6139,7 @@
                     </a:lnL>
                     <a:lnR w="12700" cap="flat" cmpd="sng" algn="ctr">
                       <a:solidFill>
-                        <a:srgbClr val="0E1726"/>
+                        <a:srgbClr val="FFFFFF"/>
                       </a:solidFill>
                       <a:prstDash val="solid"/>
                       <a:round/>
@@ -6496,7 +6148,7 @@
                     </a:lnR>
                     <a:lnT w="12700" cap="flat" cmpd="sng" algn="ctr">
                       <a:solidFill>
-                        <a:srgbClr val="0E1726"/>
+                        <a:srgbClr val="FFFFFF"/>
                       </a:solidFill>
                       <a:prstDash val="solid"/>
                       <a:round/>
@@ -6505,7 +6157,7 @@
                     </a:lnT>
                     <a:lnB w="12700" cap="flat" cmpd="sng" algn="ctr">
                       <a:solidFill>
-                        <a:srgbClr val="0E1726"/>
+                        <a:srgbClr val="FFFFFF"/>
                       </a:solidFill>
                       <a:prstDash val="solid"/>
                       <a:round/>
@@ -6530,7 +6182,7 @@
                       <a:r>
                         <a:rPr lang="en-US" sz="1200" dirty="0">
                           <a:solidFill>
-                            <a:srgbClr val="E6EDF3"/>
+                            <a:srgbClr val="1F2937"/>
                           </a:solidFill>
                         </a:rPr>
                         <a:t>Reflected</a:t>
@@ -6541,7 +6193,7 @@
                   <a:tcPr marL="76200" marR="76200" marT="38100" marB="38100" anchor="ctr">
                     <a:lnL w="12700" cap="flat" cmpd="sng" algn="ctr">
                       <a:solidFill>
-                        <a:srgbClr val="0E1726"/>
+                        <a:srgbClr val="FFFFFF"/>
                       </a:solidFill>
                       <a:prstDash val="solid"/>
                       <a:round/>
@@ -6550,7 +6202,7 @@
                     </a:lnL>
                     <a:lnR w="12700" cap="flat" cmpd="sng" algn="ctr">
                       <a:solidFill>
-                        <a:srgbClr val="0E1726"/>
+                        <a:srgbClr val="FFFFFF"/>
                       </a:solidFill>
                       <a:prstDash val="solid"/>
                       <a:round/>
@@ -6559,7 +6211,7 @@
                     </a:lnR>
                     <a:lnT w="12700" cap="flat" cmpd="sng" algn="ctr">
                       <a:solidFill>
-                        <a:srgbClr val="0E1726"/>
+                        <a:srgbClr val="FFFFFF"/>
                       </a:solidFill>
                       <a:prstDash val="solid"/>
                       <a:round/>
@@ -6568,7 +6220,7 @@
                     </a:lnT>
                     <a:lnB w="12700" cap="flat" cmpd="sng" algn="ctr">
                       <a:solidFill>
-                        <a:srgbClr val="0E1726"/>
+                        <a:srgbClr val="FFFFFF"/>
                       </a:solidFill>
                       <a:prstDash val="solid"/>
                       <a:round/>
@@ -6576,7 +6228,7 @@
                       <a:tailEnd type="none" w="med" len="med"/>
                     </a:lnB>
                     <a:solidFill>
-                      <a:srgbClr val="18243A"/>
+                      <a:srgbClr val="F1F5F9"/>
                     </a:solidFill>
                   </a:tcPr>
                 </a:tc>
@@ -6591,7 +6243,7 @@
                       <a:r>
                         <a:rPr lang="en-US" sz="1200" dirty="0">
                           <a:solidFill>
-                            <a:srgbClr val="E6EDF3"/>
+                            <a:srgbClr val="1F2937"/>
                           </a:solidFill>
                         </a:rPr>
                         <a:t>in the request, echoed back</a:t>
@@ -6602,7 +6254,7 @@
                   <a:tcPr marL="76200" marR="76200" marT="38100" marB="38100" anchor="ctr">
                     <a:lnL w="12700" cap="flat" cmpd="sng" algn="ctr">
                       <a:solidFill>
-                        <a:srgbClr val="0E1726"/>
+                        <a:srgbClr val="FFFFFF"/>
                       </a:solidFill>
                       <a:prstDash val="solid"/>
                       <a:round/>
@@ -6611,7 +6263,7 @@
                     </a:lnL>
                     <a:lnR w="12700" cap="flat" cmpd="sng" algn="ctr">
                       <a:solidFill>
-                        <a:srgbClr val="0E1726"/>
+                        <a:srgbClr val="FFFFFF"/>
                       </a:solidFill>
                       <a:prstDash val="solid"/>
                       <a:round/>
@@ -6620,7 +6272,7 @@
                     </a:lnR>
                     <a:lnT w="12700" cap="flat" cmpd="sng" algn="ctr">
                       <a:solidFill>
-                        <a:srgbClr val="0E1726"/>
+                        <a:srgbClr val="FFFFFF"/>
                       </a:solidFill>
                       <a:prstDash val="solid"/>
                       <a:round/>
@@ -6629,7 +6281,7 @@
                     </a:lnT>
                     <a:lnB w="12700" cap="flat" cmpd="sng" algn="ctr">
                       <a:solidFill>
-                        <a:srgbClr val="0E1726"/>
+                        <a:srgbClr val="FFFFFF"/>
                       </a:solidFill>
                       <a:prstDash val="solid"/>
                       <a:round/>
@@ -6637,7 +6289,7 @@
                       <a:tailEnd type="none" w="med" len="med"/>
                     </a:lnB>
                     <a:solidFill>
-                      <a:srgbClr val="18243A"/>
+                      <a:srgbClr val="F1F5F9"/>
                     </a:solidFill>
                   </a:tcPr>
                 </a:tc>
@@ -6654,7 +6306,7 @@
                       <a:r>
                         <a:rPr lang="en-US" sz="1200" dirty="0">
                           <a:solidFill>
-                            <a:srgbClr val="E6EDF3"/>
+                            <a:srgbClr val="1F2937"/>
                           </a:solidFill>
                         </a:rPr>
                         <a:t>Stored</a:t>
@@ -6665,7 +6317,7 @@
                   <a:tcPr marL="76200" marR="76200" marT="38100" marB="38100" anchor="ctr">
                     <a:lnL w="12700" cap="flat" cmpd="sng" algn="ctr">
                       <a:solidFill>
-                        <a:srgbClr val="0E1726"/>
+                        <a:srgbClr val="FFFFFF"/>
                       </a:solidFill>
                       <a:prstDash val="solid"/>
                       <a:round/>
@@ -6674,7 +6326,7 @@
                     </a:lnL>
                     <a:lnR w="12700" cap="flat" cmpd="sng" algn="ctr">
                       <a:solidFill>
-                        <a:srgbClr val="0E1726"/>
+                        <a:srgbClr val="FFFFFF"/>
                       </a:solidFill>
                       <a:prstDash val="solid"/>
                       <a:round/>
@@ -6683,7 +6335,7 @@
                     </a:lnR>
                     <a:lnT w="12700" cap="flat" cmpd="sng" algn="ctr">
                       <a:solidFill>
-                        <a:srgbClr val="0E1726"/>
+                        <a:srgbClr val="FFFFFF"/>
                       </a:solidFill>
                       <a:prstDash val="solid"/>
                       <a:round/>
@@ -6692,7 +6344,7 @@
                     </a:lnT>
                     <a:lnB w="12700" cap="flat" cmpd="sng" algn="ctr">
                       <a:solidFill>
-                        <a:srgbClr val="0E1726"/>
+                        <a:srgbClr val="FFFFFF"/>
                       </a:solidFill>
                       <a:prstDash val="solid"/>
                       <a:round/>
@@ -6700,7 +6352,7 @@
                       <a:tailEnd type="none" w="med" len="med"/>
                     </a:lnB>
                     <a:solidFill>
-                      <a:srgbClr val="1E2B45"/>
+                      <a:srgbClr val="E8EDF3"/>
                     </a:solidFill>
                   </a:tcPr>
                 </a:tc>
@@ -6715,7 +6367,7 @@
                       <a:r>
                         <a:rPr lang="en-US" sz="1200" dirty="0">
                           <a:solidFill>
-                            <a:srgbClr val="E6EDF3"/>
+                            <a:srgbClr val="1F2937"/>
                           </a:solidFill>
                         </a:rPr>
                         <a:t>saved server-side, served to others</a:t>
@@ -6726,7 +6378,7 @@
                   <a:tcPr marL="76200" marR="76200" marT="38100" marB="38100" anchor="ctr">
                     <a:lnL w="12700" cap="flat" cmpd="sng" algn="ctr">
                       <a:solidFill>
-                        <a:srgbClr val="0E1726"/>
+                        <a:srgbClr val="FFFFFF"/>
                       </a:solidFill>
                       <a:prstDash val="solid"/>
                       <a:round/>
@@ -6735,7 +6387,7 @@
                     </a:lnL>
                     <a:lnR w="12700" cap="flat" cmpd="sng" algn="ctr">
                       <a:solidFill>
-                        <a:srgbClr val="0E1726"/>
+                        <a:srgbClr val="FFFFFF"/>
                       </a:solidFill>
                       <a:prstDash val="solid"/>
                       <a:round/>
@@ -6744,7 +6396,7 @@
                     </a:lnR>
                     <a:lnT w="12700" cap="flat" cmpd="sng" algn="ctr">
                       <a:solidFill>
-                        <a:srgbClr val="0E1726"/>
+                        <a:srgbClr val="FFFFFF"/>
                       </a:solidFill>
                       <a:prstDash val="solid"/>
                       <a:round/>
@@ -6753,7 +6405,7 @@
                     </a:lnT>
                     <a:lnB w="12700" cap="flat" cmpd="sng" algn="ctr">
                       <a:solidFill>
-                        <a:srgbClr val="0E1726"/>
+                        <a:srgbClr val="FFFFFF"/>
                       </a:solidFill>
                       <a:prstDash val="solid"/>
                       <a:round/>
@@ -6761,7 +6413,7 @@
                       <a:tailEnd type="none" w="med" len="med"/>
                     </a:lnB>
                     <a:solidFill>
-                      <a:srgbClr val="1E2B45"/>
+                      <a:srgbClr val="E8EDF3"/>
                     </a:solidFill>
                   </a:tcPr>
                 </a:tc>
@@ -6778,7 +6430,7 @@
                       <a:r>
                         <a:rPr lang="en-US" sz="1200" dirty="0">
                           <a:solidFill>
-                            <a:srgbClr val="E6EDF3"/>
+                            <a:srgbClr val="1F2937"/>
                           </a:solidFill>
                         </a:rPr>
                         <a:t>DOM</a:t>
@@ -6789,7 +6441,7 @@
                   <a:tcPr marL="76200" marR="76200" marT="38100" marB="38100" anchor="ctr">
                     <a:lnL w="12700" cap="flat" cmpd="sng" algn="ctr">
                       <a:solidFill>
-                        <a:srgbClr val="0E1726"/>
+                        <a:srgbClr val="FFFFFF"/>
                       </a:solidFill>
                       <a:prstDash val="solid"/>
                       <a:round/>
@@ -6798,7 +6450,7 @@
                     </a:lnL>
                     <a:lnR w="12700" cap="flat" cmpd="sng" algn="ctr">
                       <a:solidFill>
-                        <a:srgbClr val="0E1726"/>
+                        <a:srgbClr val="FFFFFF"/>
                       </a:solidFill>
                       <a:prstDash val="solid"/>
                       <a:round/>
@@ -6807,7 +6459,7 @@
                     </a:lnR>
                     <a:lnT w="12700" cap="flat" cmpd="sng" algn="ctr">
                       <a:solidFill>
-                        <a:srgbClr val="0E1726"/>
+                        <a:srgbClr val="FFFFFF"/>
                       </a:solidFill>
                       <a:prstDash val="solid"/>
                       <a:round/>
@@ -6816,7 +6468,7 @@
                     </a:lnT>
                     <a:lnB w="12700" cap="flat" cmpd="sng" algn="ctr">
                       <a:solidFill>
-                        <a:srgbClr val="0E1726"/>
+                        <a:srgbClr val="FFFFFF"/>
                       </a:solidFill>
                       <a:prstDash val="solid"/>
                       <a:round/>
@@ -6824,7 +6476,7 @@
                       <a:tailEnd type="none" w="med" len="med"/>
                     </a:lnB>
                     <a:solidFill>
-                      <a:srgbClr val="18243A"/>
+                      <a:srgbClr val="F1F5F9"/>
                     </a:solidFill>
                   </a:tcPr>
                 </a:tc>
@@ -6839,7 +6491,7 @@
                       <a:r>
                         <a:rPr lang="en-US" sz="1200" dirty="0">
                           <a:solidFill>
-                            <a:srgbClr val="E6EDF3"/>
+                            <a:srgbClr val="1F2937"/>
                           </a:solidFill>
                         </a:rPr>
                         <a:t>client-side JS writes untrusted data to the DOM</a:t>
@@ -6850,7 +6502,7 @@
                   <a:tcPr marL="76200" marR="76200" marT="38100" marB="38100" anchor="ctr">
                     <a:lnL w="12700" cap="flat" cmpd="sng" algn="ctr">
                       <a:solidFill>
-                        <a:srgbClr val="0E1726"/>
+                        <a:srgbClr val="FFFFFF"/>
                       </a:solidFill>
                       <a:prstDash val="solid"/>
                       <a:round/>
@@ -6859,7 +6511,7 @@
                     </a:lnL>
                     <a:lnR w="12700" cap="flat" cmpd="sng" algn="ctr">
                       <a:solidFill>
-                        <a:srgbClr val="0E1726"/>
+                        <a:srgbClr val="FFFFFF"/>
                       </a:solidFill>
                       <a:prstDash val="solid"/>
                       <a:round/>
@@ -6868,7 +6520,7 @@
                     </a:lnR>
                     <a:lnT w="12700" cap="flat" cmpd="sng" algn="ctr">
                       <a:solidFill>
-                        <a:srgbClr val="0E1726"/>
+                        <a:srgbClr val="FFFFFF"/>
                       </a:solidFill>
                       <a:prstDash val="solid"/>
                       <a:round/>
@@ -6877,7 +6529,7 @@
                     </a:lnT>
                     <a:lnB w="12700" cap="flat" cmpd="sng" algn="ctr">
                       <a:solidFill>
-                        <a:srgbClr val="0E1726"/>
+                        <a:srgbClr val="FFFFFF"/>
                       </a:solidFill>
                       <a:prstDash val="solid"/>
                       <a:round/>
@@ -6885,7 +6537,7 @@
                       <a:tailEnd type="none" w="med" len="med"/>
                     </a:lnB>
                     <a:solidFill>
-                      <a:srgbClr val="18243A"/>
+                      <a:srgbClr val="F1F5F9"/>
                     </a:solidFill>
                   </a:tcPr>
                 </a:tc>
@@ -6921,7 +6573,7 @@
             <a:r>
               <a:rPr lang="en-US" sz="900" dirty="0">
                 <a:solidFill>
-                  <a:srgbClr val="94A3B8"/>
+                  <a:srgbClr val="64748B"/>
                 </a:solidFill>
                 <a:latin typeface="Calibri" pitchFamily="34" charset="0"/>
                 <a:ea typeface="Calibri" pitchFamily="34" charset="-122"/>
@@ -6933,38 +6585,9 @@
           </a:p>
         </p:txBody>
       </p:sp>
-      <p:sp>
-        <p:nvSpPr>
-          <p:cNvPr id="7" name="Shape 3"/>
-          <p:cNvSpPr/>
-          <p:nvPr/>
-        </p:nvSpPr>
-        <p:spPr>
-          <a:xfrm>
-            <a:off x="7772400" y="4590288"/>
-            <a:ext cx="969264" cy="475488"/>
-          </a:xfrm>
-          <a:prstGeom prst="roundRect">
-            <a:avLst>
-              <a:gd name="adj" fmla="val 11538"/>
-            </a:avLst>
-          </a:prstGeom>
-          <a:solidFill>
-            <a:srgbClr val="FFFFFF"/>
-          </a:solidFill>
-          <a:ln/>
-          <a:effectLst>
-            <a:outerShdw sx="100000" sy="100000" kx="0" ky="0" algn="bl" rotWithShape="0" blurRad="101600" dist="38100" dir="5400000">
-              <a:srgbClr val="000000">
-                <a:alpha val="35000"/>
-              </a:srgbClr>
-            </a:outerShdw>
-          </a:effectLst>
-        </p:spPr>
-      </p:sp>
       <p:pic>
         <p:nvPicPr>
-          <p:cNvPr id="8" name="Image 1" descr="/Users/pop7/Library/CloudStorage/OneDrive-MonsterConnectCo.,Ltd/Lecture/KOSEN69 - software-security/slides/pptx/assets/logo-small.png">    </p:cNvPr>
+          <p:cNvPr id="7" name="Image 1" descr="/Users/pop7/Library/CloudStorage/OneDrive-MonsterConnectCo.,Ltd/Lecture/KOSEN69 - software-security/slides/pptx/assets/logo-small.png">    </p:cNvPr>
           <p:cNvPicPr>
             <a:picLocks noChangeAspect="1"/>
           </p:cNvPicPr>
@@ -6978,7 +6601,7 @@
         </p:blipFill>
         <p:spPr>
           <a:xfrm>
-            <a:off x="7872984" y="4681728"/>
+            <a:off x="7882128" y="4700016"/>
             <a:ext cx="768096" cy="356616"/>
           </a:xfrm>
           <a:prstGeom prst="rect">
@@ -7000,7 +6623,7 @@
     <p:bg>
       <p:bgPr>
         <a:solidFill>
-          <a:srgbClr val="0E1726"/>
+          <a:srgbClr val="FFFFFF"/>
         </a:solidFill>
       </p:bgPr>
     </p:bg>
@@ -7037,9 +6660,9 @@
           </a:solidFill>
           <a:ln/>
           <a:effectLst>
-            <a:outerShdw sx="100000" sy="100000" kx="0" ky="0" algn="bl" rotWithShape="0" blurRad="101600" dist="38100" dir="5400000">
+            <a:outerShdw sx="100000" sy="100000" kx="0" ky="0" algn="bl" rotWithShape="0" blurRad="76200" dist="25400" dir="5400000">
               <a:srgbClr val="000000">
-                <a:alpha val="35000"/>
+                <a:alpha val="12000"/>
               </a:srgbClr>
             </a:outerShdw>
           </a:effectLst>
@@ -7096,7 +6719,7 @@
             <a:r>
               <a:rPr lang="en-US" sz="2600" b="1" dirty="0">
                 <a:solidFill>
-                  <a:srgbClr val="E6EDF3"/>
+                  <a:srgbClr val="1F2937"/>
                 </a:solidFill>
                 <a:latin typeface="Arial" pitchFamily="34" charset="0"/>
                 <a:ea typeface="Arial" pitchFamily="34" charset="-122"/>
@@ -7129,7 +6752,7 @@
           </a:solidFill>
           <a:ln w="12700">
             <a:solidFill>
-              <a:srgbClr val="1E2B45"/>
+              <a:srgbClr val="E8EDF3"/>
             </a:solidFill>
             <a:prstDash val="solid"/>
           </a:ln>
@@ -7225,13 +6848,13 @@
             </a:avLst>
           </a:prstGeom>
           <a:solidFill>
-            <a:srgbClr val="18243A"/>
+            <a:srgbClr val="F1F5F9"/>
           </a:solidFill>
           <a:ln/>
           <a:effectLst>
-            <a:outerShdw sx="100000" sy="100000" kx="0" ky="0" algn="bl" rotWithShape="0" blurRad="101600" dist="38100" dir="5400000">
+            <a:outerShdw sx="100000" sy="100000" kx="0" ky="0" algn="bl" rotWithShape="0" blurRad="76200" dist="25400" dir="5400000">
               <a:srgbClr val="000000">
-                <a:alpha val="35000"/>
+                <a:alpha val="12000"/>
               </a:srgbClr>
             </a:outerShdw>
           </a:effectLst>
@@ -7268,7 +6891,7 @@
             <a:r>
               <a:rPr lang="en-US" sz="1400" dirty="0">
                 <a:solidFill>
-                  <a:srgbClr val="E6EDF3"/>
+                  <a:srgbClr val="1F2937"/>
                 </a:solidFill>
                 <a:latin typeface="Calibri" pitchFamily="34" charset="0"/>
                 <a:ea typeface="Calibri" pitchFamily="34" charset="-122"/>
@@ -7307,7 +6930,7 @@
             <a:r>
               <a:rPr lang="en-US" sz="900" dirty="0">
                 <a:solidFill>
-                  <a:srgbClr val="94A3B8"/>
+                  <a:srgbClr val="64748B"/>
                 </a:solidFill>
                 <a:latin typeface="Calibri" pitchFamily="34" charset="0"/>
                 <a:ea typeface="Calibri" pitchFamily="34" charset="-122"/>
@@ -7319,38 +6942,9 @@
           </a:p>
         </p:txBody>
       </p:sp>
-      <p:sp>
-        <p:nvSpPr>
-          <p:cNvPr id="10" name="Shape 7"/>
-          <p:cNvSpPr/>
-          <p:nvPr/>
-        </p:nvSpPr>
-        <p:spPr>
-          <a:xfrm>
-            <a:off x="7772400" y="4590288"/>
-            <a:ext cx="969264" cy="475488"/>
-          </a:xfrm>
-          <a:prstGeom prst="roundRect">
-            <a:avLst>
-              <a:gd name="adj" fmla="val 11538"/>
-            </a:avLst>
-          </a:prstGeom>
-          <a:solidFill>
-            <a:srgbClr val="FFFFFF"/>
-          </a:solidFill>
-          <a:ln/>
-          <a:effectLst>
-            <a:outerShdw sx="100000" sy="100000" kx="0" ky="0" algn="bl" rotWithShape="0" blurRad="101600" dist="38100" dir="5400000">
-              <a:srgbClr val="000000">
-                <a:alpha val="35000"/>
-              </a:srgbClr>
-            </a:outerShdw>
-          </a:effectLst>
-        </p:spPr>
-      </p:sp>
       <p:pic>
         <p:nvPicPr>
-          <p:cNvPr id="11" name="Image 1" descr="/Users/pop7/Library/CloudStorage/OneDrive-MonsterConnectCo.,Ltd/Lecture/KOSEN69 - software-security/slides/pptx/assets/logo-small.png">    </p:cNvPr>
+          <p:cNvPr id="10" name="Image 1" descr="/Users/pop7/Library/CloudStorage/OneDrive-MonsterConnectCo.,Ltd/Lecture/KOSEN69 - software-security/slides/pptx/assets/logo-small.png">    </p:cNvPr>
           <p:cNvPicPr>
             <a:picLocks noChangeAspect="1"/>
           </p:cNvPicPr>
@@ -7364,7 +6958,7 @@
         </p:blipFill>
         <p:spPr>
           <a:xfrm>
-            <a:off x="7872984" y="4681728"/>
+            <a:off x="7882128" y="4700016"/>
             <a:ext cx="768096" cy="356616"/>
           </a:xfrm>
           <a:prstGeom prst="rect">
@@ -7386,7 +6980,7 @@
     <p:bg>
       <p:bgPr>
         <a:solidFill>
-          <a:srgbClr val="0E1726"/>
+          <a:srgbClr val="FFFFFF"/>
         </a:solidFill>
       </p:bgPr>
     </p:bg>
@@ -7423,9 +7017,9 @@
           </a:solidFill>
           <a:ln/>
           <a:effectLst>
-            <a:outerShdw sx="100000" sy="100000" kx="0" ky="0" algn="bl" rotWithShape="0" blurRad="101600" dist="38100" dir="5400000">
+            <a:outerShdw sx="100000" sy="100000" kx="0" ky="0" algn="bl" rotWithShape="0" blurRad="76200" dist="25400" dir="5400000">
               <a:srgbClr val="000000">
-                <a:alpha val="35000"/>
+                <a:alpha val="12000"/>
               </a:srgbClr>
             </a:outerShdw>
           </a:effectLst>
@@ -7482,7 +7076,7 @@
             <a:r>
               <a:rPr lang="en-US" sz="2600" b="1" dirty="0">
                 <a:solidFill>
-                  <a:srgbClr val="E6EDF3"/>
+                  <a:srgbClr val="1F2937"/>
                 </a:solidFill>
                 <a:latin typeface="Arial" pitchFamily="34" charset="0"/>
                 <a:ea typeface="Arial" pitchFamily="34" charset="-122"/>
@@ -7511,13 +7105,13 @@
             </a:avLst>
           </a:prstGeom>
           <a:solidFill>
-            <a:srgbClr val="18243A"/>
+            <a:srgbClr val="F1F5F9"/>
           </a:solidFill>
           <a:ln/>
           <a:effectLst>
-            <a:outerShdw sx="100000" sy="100000" kx="0" ky="0" algn="bl" rotWithShape="0" blurRad="101600" dist="38100" dir="5400000">
+            <a:outerShdw sx="100000" sy="100000" kx="0" ky="0" algn="bl" rotWithShape="0" blurRad="76200" dist="25400" dir="5400000">
               <a:srgbClr val="000000">
-                <a:alpha val="35000"/>
+                <a:alpha val="12000"/>
               </a:srgbClr>
             </a:outerShdw>
           </a:effectLst>
@@ -7554,7 +7148,7 @@
             <a:r>
               <a:rPr lang="en-US" sz="1400" dirty="0">
                 <a:solidFill>
-                  <a:srgbClr val="E6EDF3"/>
+                  <a:srgbClr val="1F2937"/>
                 </a:solidFill>
                 <a:latin typeface="Calibri" pitchFamily="34" charset="0"/>
                 <a:ea typeface="Calibri" pitchFamily="34" charset="-122"/>
@@ -7575,7 +7169,7 @@
             <a:r>
               <a:rPr lang="en-US" sz="1400" dirty="0">
                 <a:solidFill>
-                  <a:srgbClr val="E6EDF3"/>
+                  <a:srgbClr val="1F2937"/>
                 </a:solidFill>
                 <a:latin typeface="Calibri" pitchFamily="34" charset="0"/>
                 <a:ea typeface="Calibri" pitchFamily="34" charset="-122"/>
@@ -7614,7 +7208,7 @@
             <a:r>
               <a:rPr lang="en-US" sz="900" dirty="0">
                 <a:solidFill>
-                  <a:srgbClr val="94A3B8"/>
+                  <a:srgbClr val="64748B"/>
                 </a:solidFill>
                 <a:latin typeface="Calibri" pitchFamily="34" charset="0"/>
                 <a:ea typeface="Calibri" pitchFamily="34" charset="-122"/>
@@ -7626,38 +7220,9 @@
           </a:p>
         </p:txBody>
       </p:sp>
-      <p:sp>
-        <p:nvSpPr>
-          <p:cNvPr id="8" name="Shape 5"/>
-          <p:cNvSpPr/>
-          <p:nvPr/>
-        </p:nvSpPr>
-        <p:spPr>
-          <a:xfrm>
-            <a:off x="7772400" y="4590288"/>
-            <a:ext cx="969264" cy="475488"/>
-          </a:xfrm>
-          <a:prstGeom prst="roundRect">
-            <a:avLst>
-              <a:gd name="adj" fmla="val 11538"/>
-            </a:avLst>
-          </a:prstGeom>
-          <a:solidFill>
-            <a:srgbClr val="FFFFFF"/>
-          </a:solidFill>
-          <a:ln/>
-          <a:effectLst>
-            <a:outerShdw sx="100000" sy="100000" kx="0" ky="0" algn="bl" rotWithShape="0" blurRad="101600" dist="38100" dir="5400000">
-              <a:srgbClr val="000000">
-                <a:alpha val="35000"/>
-              </a:srgbClr>
-            </a:outerShdw>
-          </a:effectLst>
-        </p:spPr>
-      </p:sp>
       <p:pic>
         <p:nvPicPr>
-          <p:cNvPr id="9" name="Image 1" descr="/Users/pop7/Library/CloudStorage/OneDrive-MonsterConnectCo.,Ltd/Lecture/KOSEN69 - software-security/slides/pptx/assets/logo-small.png">    </p:cNvPr>
+          <p:cNvPr id="8" name="Image 1" descr="/Users/pop7/Library/CloudStorage/OneDrive-MonsterConnectCo.,Ltd/Lecture/KOSEN69 - software-security/slides/pptx/assets/logo-small.png">    </p:cNvPr>
           <p:cNvPicPr>
             <a:picLocks noChangeAspect="1"/>
           </p:cNvPicPr>
@@ -7671,7 +7236,7 @@
         </p:blipFill>
         <p:spPr>
           <a:xfrm>
-            <a:off x="7872984" y="4681728"/>
+            <a:off x="7882128" y="4700016"/>
             <a:ext cx="768096" cy="356616"/>
           </a:xfrm>
           <a:prstGeom prst="rect">
@@ -7693,7 +7258,7 @@
     <p:bg>
       <p:bgPr>
         <a:solidFill>
-          <a:srgbClr val="0E1726"/>
+          <a:srgbClr val="FFFFFF"/>
         </a:solidFill>
       </p:bgPr>
     </p:bg>
@@ -7730,9 +7295,9 @@
           </a:solidFill>
           <a:ln/>
           <a:effectLst>
-            <a:outerShdw sx="100000" sy="100000" kx="0" ky="0" algn="bl" rotWithShape="0" blurRad="101600" dist="38100" dir="5400000">
+            <a:outerShdw sx="100000" sy="100000" kx="0" ky="0" algn="bl" rotWithShape="0" blurRad="76200" dist="25400" dir="5400000">
               <a:srgbClr val="000000">
-                <a:alpha val="35000"/>
+                <a:alpha val="12000"/>
               </a:srgbClr>
             </a:outerShdw>
           </a:effectLst>
@@ -7789,7 +7354,7 @@
             <a:r>
               <a:rPr lang="en-US" sz="2600" b="1" dirty="0">
                 <a:solidFill>
-                  <a:srgbClr val="E6EDF3"/>
+                  <a:srgbClr val="1F2937"/>
                 </a:solidFill>
                 <a:latin typeface="Arial" pitchFamily="34" charset="0"/>
                 <a:ea typeface="Arial" pitchFamily="34" charset="-122"/>
@@ -7818,13 +7383,13 @@
             </a:avLst>
           </a:prstGeom>
           <a:solidFill>
-            <a:srgbClr val="18243A"/>
+            <a:srgbClr val="F1F5F9"/>
           </a:solidFill>
           <a:ln/>
           <a:effectLst>
-            <a:outerShdw sx="100000" sy="100000" kx="0" ky="0" algn="bl" rotWithShape="0" blurRad="101600" dist="38100" dir="5400000">
+            <a:outerShdw sx="100000" sy="100000" kx="0" ky="0" algn="bl" rotWithShape="0" blurRad="76200" dist="25400" dir="5400000">
               <a:srgbClr val="000000">
-                <a:alpha val="35000"/>
+                <a:alpha val="12000"/>
               </a:srgbClr>
             </a:outerShdw>
           </a:effectLst>
@@ -7861,7 +7426,7 @@
             <a:r>
               <a:rPr lang="en-US" sz="1400" dirty="0">
                 <a:solidFill>
-                  <a:srgbClr val="E6EDF3"/>
+                  <a:srgbClr val="1F2937"/>
                 </a:solidFill>
                 <a:latin typeface="Calibri" pitchFamily="34" charset="0"/>
                 <a:ea typeface="Calibri" pitchFamily="34" charset="-122"/>
@@ -7882,7 +7447,7 @@
             <a:r>
               <a:rPr lang="en-US" sz="1400" dirty="0">
                 <a:solidFill>
-                  <a:srgbClr val="E6EDF3"/>
+                  <a:srgbClr val="1F2937"/>
                 </a:solidFill>
                 <a:latin typeface="Calibri" pitchFamily="34" charset="0"/>
                 <a:ea typeface="Calibri" pitchFamily="34" charset="-122"/>
@@ -7903,7 +7468,7 @@
             <a:r>
               <a:rPr lang="en-US" sz="1400" dirty="0">
                 <a:solidFill>
-                  <a:srgbClr val="E6EDF3"/>
+                  <a:srgbClr val="1F2937"/>
                 </a:solidFill>
                 <a:latin typeface="Calibri" pitchFamily="34" charset="0"/>
                 <a:ea typeface="Calibri" pitchFamily="34" charset="-122"/>
@@ -7932,7 +7497,7 @@
             </a:avLst>
           </a:prstGeom>
           <a:solidFill>
-            <a:srgbClr val="1E2B45"/>
+            <a:srgbClr val="E8EDF3"/>
           </a:solidFill>
           <a:ln/>
         </p:spPr>
@@ -8003,7 +7568,7 @@
             <a:r>
               <a:rPr lang="en-US" sz="900" dirty="0">
                 <a:solidFill>
-                  <a:srgbClr val="94A3B8"/>
+                  <a:srgbClr val="64748B"/>
                 </a:solidFill>
                 <a:latin typeface="Calibri" pitchFamily="34" charset="0"/>
                 <a:ea typeface="Calibri" pitchFamily="34" charset="-122"/>
@@ -8015,38 +7580,9 @@
           </a:p>
         </p:txBody>
       </p:sp>
-      <p:sp>
-        <p:nvSpPr>
-          <p:cNvPr id="10" name="Shape 7"/>
-          <p:cNvSpPr/>
-          <p:nvPr/>
-        </p:nvSpPr>
-        <p:spPr>
-          <a:xfrm>
-            <a:off x="7772400" y="4590288"/>
-            <a:ext cx="969264" cy="475488"/>
-          </a:xfrm>
-          <a:prstGeom prst="roundRect">
-            <a:avLst>
-              <a:gd name="adj" fmla="val 11538"/>
-            </a:avLst>
-          </a:prstGeom>
-          <a:solidFill>
-            <a:srgbClr val="FFFFFF"/>
-          </a:solidFill>
-          <a:ln/>
-          <a:effectLst>
-            <a:outerShdw sx="100000" sy="100000" kx="0" ky="0" algn="bl" rotWithShape="0" blurRad="101600" dist="38100" dir="5400000">
-              <a:srgbClr val="000000">
-                <a:alpha val="35000"/>
-              </a:srgbClr>
-            </a:outerShdw>
-          </a:effectLst>
-        </p:spPr>
-      </p:sp>
       <p:pic>
         <p:nvPicPr>
-          <p:cNvPr id="11" name="Image 1" descr="/Users/pop7/Library/CloudStorage/OneDrive-MonsterConnectCo.,Ltd/Lecture/KOSEN69 - software-security/slides/pptx/assets/logo-small.png">    </p:cNvPr>
+          <p:cNvPr id="10" name="Image 1" descr="/Users/pop7/Library/CloudStorage/OneDrive-MonsterConnectCo.,Ltd/Lecture/KOSEN69 - software-security/slides/pptx/assets/logo-small.png">    </p:cNvPr>
           <p:cNvPicPr>
             <a:picLocks noChangeAspect="1"/>
           </p:cNvPicPr>
@@ -8060,7 +7596,7 @@
         </p:blipFill>
         <p:spPr>
           <a:xfrm>
-            <a:off x="7872984" y="4681728"/>
+            <a:off x="7882128" y="4700016"/>
             <a:ext cx="768096" cy="356616"/>
           </a:xfrm>
           <a:prstGeom prst="rect">

--- a/slides/pptx/week05.pptx
+++ b/slides/pptx/week05.pptx
@@ -517,7 +517,7 @@
           <a:p>
             <a:r>
               <a:rPr lang="en-US" dirty="0"/>
-              <a:t/>
+              <a:t>Hook: pop an alert(1) on a real site clone, then show the same payload exfiltrating a cookie. "XSS is injection that runs in YOUR browser, as the site you trust." ~2 min.</a:t>
             </a:r>
             <a:endParaRPr lang="en-US" dirty="0"/>
           </a:p>
@@ -605,7 +605,7 @@
           <a:p>
             <a:r>
               <a:rPr lang="en-US" dirty="0"/>
-              <a:t/>
+              <a:t>Quick reference for the worksheet. ~1 min.</a:t>
             </a:r>
             <a:endParaRPr lang="en-US" dirty="0"/>
           </a:p>
@@ -693,7 +693,7 @@
           <a:p>
             <a:r>
               <a:rPr lang="en-US" dirty="0"/>
-              <a:t/>
+              <a:t>The payoff. #1: encode for the OUTPUT CONTEXT (the bug is on output). Modern frameworks auto-escape — the danger is when devs opt out (innerHTML). CSP is defense-in-depth: even if a payload lands, the browser refuses to run it. ~6 min.</a:t>
             </a:r>
             <a:endParaRPr lang="en-US" dirty="0"/>
           </a:p>
@@ -781,7 +781,7 @@
           <a:p>
             <a:r>
               <a:rPr lang="en-US" dirty="0"/>
-              <a:t/>
+              <a:t>Explain before lab: golf = fewest characters → forces real understanding of contexts. Round 2 (defend) is the graded part. The "break a classmate's CSP" bonus teaches that CSP is hard to get right. ~3 min.</a:t>
             </a:r>
             <a:endParaRPr lang="en-US" dirty="0"/>
           </a:p>
@@ -869,7 +869,7 @@
           <a:p>
             <a:r>
               <a:rPr lang="en-US" dirty="0"/>
-              <a:t/>
+              <a:t>Logistics. Cookie theft must hit only the sandbox collector, not a real site (ethics). Step 3-4 (defend) are graded. Q6 of the quiz asks for their own scoring payload + the sink it hit.</a:t>
             </a:r>
             <a:endParaRPr lang="en-US" dirty="0"/>
           </a:p>
@@ -957,7 +957,7 @@
           <a:p>
             <a:r>
               <a:rPr lang="en-US" dirty="0"/>
-              <a:t/>
+              <a:t>Before/after + the reasoning note. Remind the AI-resilient tasks count.</a:t>
             </a:r>
             <a:endParaRPr lang="en-US" dirty="0"/>
           </a:p>
@@ -1045,7 +1045,7 @@
           <a:p>
             <a:r>
               <a:rPr lang="en-US" dirty="0"/>
-              <a:t/>
+              <a:t>Recap. Cold-call: "where is the XSS bug — input or output?" (output rendering). ~2 min.</a:t>
             </a:r>
             <a:endParaRPr lang="en-US" dirty="0"/>
           </a:p>
@@ -1133,7 +1133,7 @@
           <a:p>
             <a:r>
               <a:rPr lang="en-US" dirty="0"/>
-              <a:t/>
+              <a:t>Cliffhanger: "Next week — change one number in a URL and read someone else's data; forge a token and become admin." Remind Juice Shop ready.</a:t>
             </a:r>
             <a:endParaRPr lang="en-US" dirty="0"/>
           </a:p>
@@ -1221,7 +1221,7 @@
           <a:p>
             <a:r>
               <a:rPr lang="en-US" dirty="0"/>
-              <a:t/>
+              <a:t>Roadmap, 1 min. Frame: last week injection hit the server (SQL); this week it hits the client (the DOM). Same root cause, different interpreter (the browser).</a:t>
             </a:r>
             <a:endParaRPr lang="en-US" dirty="0"/>
           </a:p>
@@ -1309,7 +1309,7 @@
           <a:p>
             <a:r>
               <a:rPr lang="en-US" dirty="0"/>
-              <a:t/>
+              <a:t>1-min bridge. The interpreter today is the browser's HTML/JS parser. Ask: "what was the one fix for SQLi?" then say: the XSS analogue is context-aware output encoding.</a:t>
             </a:r>
             <a:endParaRPr lang="en-US" dirty="0"/>
           </a:p>
@@ -1397,7 +1397,7 @@
           <a:p>
             <a:r>
               <a:rPr lang="en-US" dirty="0"/>
-              <a:t/>
+              <a:t>Foundational — XSS is dangerous precisely because injected script runs INSIDE the origin, so SOP protects the attacker's code, not you. Give an origin example: https://a.com:443 vs http://a.com differ. ~5 min.</a:t>
             </a:r>
             <a:endParaRPr lang="en-US" dirty="0"/>
           </a:p>
@@ -1485,7 +1485,7 @@
           <a:p>
             <a:r>
               <a:rPr lang="en-US" dirty="0"/>
-              <a:t/>
+              <a:t>Drive home: because the script runs as the site, it can do anything the user can. List concrete harms. "Output side" = the bug is in how we render data, not how we store it. ~4 min.</a:t>
             </a:r>
             <a:endParaRPr lang="en-US" dirty="0"/>
           </a:p>
@@ -1573,7 +1573,7 @@
           <a:p>
             <a:r>
               <a:rPr lang="en-US" dirty="0"/>
-              <a:t/>
+              <a:t>Go row by row with an example each: reflected = malicious link; stored = a comment that attacks every viewer (worst); DOM = `location.hash` written to innerHTML. Ask which is most dangerous and why (stored — hits everyone). ~6 min.</a:t>
             </a:r>
             <a:endParaRPr lang="en-US" dirty="0"/>
           </a:p>
@@ -1661,7 +1661,7 @@
           <a:p>
             <a:r>
               <a:rPr lang="en-US" dirty="0"/>
-              <a:t/>
+              <a:t>These are the XSS Golf payloads. Explain why `&lt;img onerror&gt;` works when `&lt;script&gt;` is filtered, and why `"&gt;` breaks out of an attribute first. The context point is the key learning — the same data needs different encoding in each place. ~6 min.</a:t>
             </a:r>
             <a:endParaRPr lang="en-US" dirty="0"/>
           </a:p>
@@ -1749,7 +1749,7 @@
           <a:p>
             <a:r>
               <a:rPr lang="en-US" dirty="0"/>
-              <a:t/>
+              <a:t>Contrast with XSS: CSRF needs no script on the page — it abuses the browser auto-attaching cookies. Example: a hidden form that POSTs a transfer. SameSite cookies break the auto-send. ~5 min.</a:t>
             </a:r>
             <a:endParaRPr lang="en-US" dirty="0"/>
           </a:p>
@@ -1837,7 +1837,7 @@
           <a:p>
             <a:r>
               <a:rPr lang="en-US" dirty="0"/>
-              <a:t/>
+              <a:t>Make it real. Magecart = the keylogging harm from 2 slides ago, at scale, on a Fortune-500 checkout. Note it often enters via a compromised third-party script — which motivates CSP next. ~3 min.</a:t>
             </a:r>
             <a:endParaRPr lang="en-US" dirty="0"/>
           </a:p>
@@ -4019,11 +4019,11 @@
         <p:spPr>
           <a:xfrm>
             <a:off x="457200" y="1325880"/>
-            <a:ext cx="8229600" cy="1207008"/>
+            <a:ext cx="8229600" cy="1517904"/>
           </a:xfrm>
           <a:prstGeom prst="roundRect">
             <a:avLst>
-              <a:gd name="adj" fmla="val 6061"/>
+              <a:gd name="adj" fmla="val 4819"/>
             </a:avLst>
           </a:prstGeom>
           <a:solidFill>
@@ -4048,7 +4048,7 @@
         <p:spPr>
           <a:xfrm>
             <a:off x="731520" y="1435608"/>
-            <a:ext cx="7680960" cy="987552"/>
+            <a:ext cx="7680960" cy="1298448"/>
           </a:xfrm>
           <a:prstGeom prst="rect">
             <a:avLst/>
@@ -4119,6 +4119,27 @@
                 <a:cs typeface="Calibri" pitchFamily="34" charset="-120"/>
               </a:rPr>
               <a:t>Short note: why SameSite + tokens stop CSRF</a:t>
+            </a:r>
+            <a:endParaRPr lang="en-US" sz="1400" dirty="0"/>
+          </a:p>
+          <a:p>
+            <a:pPr marL="342900" indent="-342900">
+              <a:spcAft>
+                <a:spcPts val="600"/>
+              </a:spcAft>
+              <a:buSzPct val="100000"/>
+              <a:buChar char="•"/>
+            </a:pPr>
+            <a:r>
+              <a:rPr lang="en-US" sz="1400" dirty="0">
+                <a:solidFill>
+                  <a:srgbClr val="1F2937"/>
+                </a:solidFill>
+                <a:latin typeface="Calibri" pitchFamily="34" charset="0"/>
+                <a:ea typeface="Calibri" pitchFamily="34" charset="-122"/>
+                <a:cs typeface="Calibri" pitchFamily="34" charset="-120"/>
+              </a:rPr>
+              <a:t>+ Audit the AI / EiPE / Prompt Problem (see worksheet)</a:t>
             </a:r>
             <a:endParaRPr lang="en-US" sz="1400" dirty="0"/>
           </a:p>

--- a/slides/pptx/week05.pptx
+++ b/slides/pptx/week05.pptx
@@ -3441,7 +3441,68 @@
         </p:nvSpPr>
         <p:spPr>
           <a:xfrm>
-            <a:off x="502920" y="1325880"/>
+            <a:off x="457200" y="1325880"/>
+            <a:ext cx="8229600" cy="822960"/>
+          </a:xfrm>
+          <a:prstGeom prst="roundRect">
+            <a:avLst>
+              <a:gd name="adj" fmla="val 8889"/>
+            </a:avLst>
+          </a:prstGeom>
+          <a:solidFill>
+            <a:srgbClr val="E8EDF3"/>
+          </a:solidFill>
+          <a:ln/>
+        </p:spPr>
+      </p:sp>
+      <p:sp>
+        <p:nvSpPr>
+          <p:cNvPr id="6" name="Text 3"/>
+          <p:cNvSpPr/>
+          <p:nvPr/>
+        </p:nvSpPr>
+        <p:spPr>
+          <a:xfrm>
+            <a:off x="731520" y="1325880"/>
+            <a:ext cx="7680960" cy="822960"/>
+          </a:xfrm>
+          <a:prstGeom prst="rect">
+            <a:avLst/>
+          </a:prstGeom>
+          <a:noFill/>
+          <a:ln/>
+        </p:spPr>
+        <p:txBody>
+          <a:bodyPr wrap="square" lIns="0" tIns="0" rIns="0" bIns="0" rtlCol="0" anchor="ctr"/>
+          <a:lstStyle/>
+          <a:p>
+            <a:pPr indent="0" marL="0">
+              <a:buNone/>
+            </a:pPr>
+            <a:r>
+              <a:rPr lang="en-US" sz="1400" i="1" dirty="0">
+                <a:solidFill>
+                  <a:srgbClr val="E35205"/>
+                </a:solidFill>
+                <a:latin typeface="Calibri" pitchFamily="34" charset="0"/>
+                <a:ea typeface="Calibri" pitchFamily="34" charset="-122"/>
+                <a:cs typeface="Calibri" pitchFamily="34" charset="-120"/>
+              </a:rPr>
+              <a:t>📋 Worksheet 5 — labs/week05-xss-client-side/worksheet.md (Part 3) · kickoff: docker compose up → http://localhost:5000</a:t>
+            </a:r>
+            <a:endParaRPr lang="en-US" sz="1400" dirty="0"/>
+          </a:p>
+        </p:txBody>
+      </p:sp>
+      <p:sp>
+        <p:nvSpPr>
+          <p:cNvPr id="7" name="Shape 4"/>
+          <p:cNvSpPr/>
+          <p:nvPr/>
+        </p:nvSpPr>
+        <p:spPr>
+          <a:xfrm>
+            <a:off x="502920" y="2313432"/>
             <a:ext cx="384048" cy="384048"/>
           </a:xfrm>
           <a:prstGeom prst="ellipse">
@@ -3455,13 +3516,13 @@
       </p:sp>
       <p:sp>
         <p:nvSpPr>
-          <p:cNvPr id="6" name="Text 3"/>
-          <p:cNvSpPr/>
-          <p:nvPr/>
-        </p:nvSpPr>
-        <p:spPr>
-          <a:xfrm>
-            <a:off x="502920" y="1325880"/>
+          <p:cNvPr id="8" name="Text 5"/>
+          <p:cNvSpPr/>
+          <p:nvPr/>
+        </p:nvSpPr>
+        <p:spPr>
+          <a:xfrm>
+            <a:off x="502920" y="2313432"/>
             <a:ext cx="384048" cy="384048"/>
           </a:xfrm>
           <a:prstGeom prst="rect">
@@ -3494,13 +3555,13 @@
       </p:sp>
       <p:sp>
         <p:nvSpPr>
-          <p:cNvPr id="7" name="Text 4"/>
-          <p:cNvSpPr/>
-          <p:nvPr/>
-        </p:nvSpPr>
-        <p:spPr>
-          <a:xfrm>
-            <a:off x="1051560" y="1325880"/>
+          <p:cNvPr id="9" name="Text 6"/>
+          <p:cNvSpPr/>
+          <p:nvPr/>
+        </p:nvSpPr>
+        <p:spPr>
+          <a:xfrm>
+            <a:off x="1051560" y="2313432"/>
             <a:ext cx="7589520" cy="384048"/>
           </a:xfrm>
           <a:prstGeom prst="rect">
@@ -3533,13 +3594,13 @@
       </p:sp>
       <p:sp>
         <p:nvSpPr>
-          <p:cNvPr id="8" name="Shape 5"/>
-          <p:cNvSpPr/>
-          <p:nvPr/>
-        </p:nvSpPr>
-        <p:spPr>
-          <a:xfrm>
-            <a:off x="502920" y="1783080"/>
+          <p:cNvPr id="10" name="Shape 7"/>
+          <p:cNvSpPr/>
+          <p:nvPr/>
+        </p:nvSpPr>
+        <p:spPr>
+          <a:xfrm>
+            <a:off x="502920" y="2770632"/>
             <a:ext cx="384048" cy="384048"/>
           </a:xfrm>
           <a:prstGeom prst="ellipse">
@@ -3553,13 +3614,13 @@
       </p:sp>
       <p:sp>
         <p:nvSpPr>
-          <p:cNvPr id="9" name="Text 6"/>
-          <p:cNvSpPr/>
-          <p:nvPr/>
-        </p:nvSpPr>
-        <p:spPr>
-          <a:xfrm>
-            <a:off x="502920" y="1783080"/>
+          <p:cNvPr id="11" name="Text 8"/>
+          <p:cNvSpPr/>
+          <p:nvPr/>
+        </p:nvSpPr>
+        <p:spPr>
+          <a:xfrm>
+            <a:off x="502920" y="2770632"/>
             <a:ext cx="384048" cy="384048"/>
           </a:xfrm>
           <a:prstGeom prst="rect">
@@ -3592,13 +3653,13 @@
       </p:sp>
       <p:sp>
         <p:nvSpPr>
-          <p:cNvPr id="10" name="Text 7"/>
-          <p:cNvSpPr/>
-          <p:nvPr/>
-        </p:nvSpPr>
-        <p:spPr>
-          <a:xfrm>
-            <a:off x="1051560" y="1783080"/>
+          <p:cNvPr id="12" name="Text 9"/>
+          <p:cNvSpPr/>
+          <p:nvPr/>
+        </p:nvSpPr>
+        <p:spPr>
+          <a:xfrm>
+            <a:off x="1051560" y="2770632"/>
             <a:ext cx="7589520" cy="384048"/>
           </a:xfrm>
           <a:prstGeom prst="rect">
@@ -3631,13 +3692,13 @@
       </p:sp>
       <p:sp>
         <p:nvSpPr>
-          <p:cNvPr id="11" name="Shape 8"/>
-          <p:cNvSpPr/>
-          <p:nvPr/>
-        </p:nvSpPr>
-        <p:spPr>
-          <a:xfrm>
-            <a:off x="502920" y="2240280"/>
+          <p:cNvPr id="13" name="Shape 10"/>
+          <p:cNvSpPr/>
+          <p:nvPr/>
+        </p:nvSpPr>
+        <p:spPr>
+          <a:xfrm>
+            <a:off x="502920" y="3227832"/>
             <a:ext cx="384048" cy="384048"/>
           </a:xfrm>
           <a:prstGeom prst="ellipse">
@@ -3651,13 +3712,13 @@
       </p:sp>
       <p:sp>
         <p:nvSpPr>
-          <p:cNvPr id="12" name="Text 9"/>
-          <p:cNvSpPr/>
-          <p:nvPr/>
-        </p:nvSpPr>
-        <p:spPr>
-          <a:xfrm>
-            <a:off x="502920" y="2240280"/>
+          <p:cNvPr id="14" name="Text 11"/>
+          <p:cNvSpPr/>
+          <p:nvPr/>
+        </p:nvSpPr>
+        <p:spPr>
+          <a:xfrm>
+            <a:off x="502920" y="3227832"/>
             <a:ext cx="384048" cy="384048"/>
           </a:xfrm>
           <a:prstGeom prst="rect">
@@ -3690,13 +3751,13 @@
       </p:sp>
       <p:sp>
         <p:nvSpPr>
-          <p:cNvPr id="13" name="Text 10"/>
-          <p:cNvSpPr/>
-          <p:nvPr/>
-        </p:nvSpPr>
-        <p:spPr>
-          <a:xfrm>
-            <a:off x="1051560" y="2240280"/>
+          <p:cNvPr id="15" name="Text 12"/>
+          <p:cNvSpPr/>
+          <p:nvPr/>
+        </p:nvSpPr>
+        <p:spPr>
+          <a:xfrm>
+            <a:off x="1051560" y="3227832"/>
             <a:ext cx="7589520" cy="384048"/>
           </a:xfrm>
           <a:prstGeom prst="rect">
@@ -3729,13 +3790,13 @@
       </p:sp>
       <p:sp>
         <p:nvSpPr>
-          <p:cNvPr id="14" name="Shape 11"/>
-          <p:cNvSpPr/>
-          <p:nvPr/>
-        </p:nvSpPr>
-        <p:spPr>
-          <a:xfrm>
-            <a:off x="502920" y="2697480"/>
+          <p:cNvPr id="16" name="Shape 13"/>
+          <p:cNvSpPr/>
+          <p:nvPr/>
+        </p:nvSpPr>
+        <p:spPr>
+          <a:xfrm>
+            <a:off x="502920" y="3685032"/>
             <a:ext cx="384048" cy="384048"/>
           </a:xfrm>
           <a:prstGeom prst="ellipse">
@@ -3749,13 +3810,13 @@
       </p:sp>
       <p:sp>
         <p:nvSpPr>
-          <p:cNvPr id="15" name="Text 12"/>
-          <p:cNvSpPr/>
-          <p:nvPr/>
-        </p:nvSpPr>
-        <p:spPr>
-          <a:xfrm>
-            <a:off x="502920" y="2697480"/>
+          <p:cNvPr id="17" name="Text 14"/>
+          <p:cNvSpPr/>
+          <p:nvPr/>
+        </p:nvSpPr>
+        <p:spPr>
+          <a:xfrm>
+            <a:off x="502920" y="3685032"/>
             <a:ext cx="384048" cy="384048"/>
           </a:xfrm>
           <a:prstGeom prst="rect">
@@ -3788,13 +3849,13 @@
       </p:sp>
       <p:sp>
         <p:nvSpPr>
-          <p:cNvPr id="16" name="Text 13"/>
-          <p:cNvSpPr/>
-          <p:nvPr/>
-        </p:nvSpPr>
-        <p:spPr>
-          <a:xfrm>
-            <a:off x="1051560" y="2697480"/>
+          <p:cNvPr id="18" name="Text 15"/>
+          <p:cNvSpPr/>
+          <p:nvPr/>
+        </p:nvSpPr>
+        <p:spPr>
+          <a:xfrm>
+            <a:off x="1051560" y="3685032"/>
             <a:ext cx="7589520" cy="384048"/>
           </a:xfrm>
           <a:prstGeom prst="rect">
@@ -3827,7 +3888,7 @@
       </p:sp>
       <p:sp>
         <p:nvSpPr>
-          <p:cNvPr id="17" name="Text 14"/>
+          <p:cNvPr id="19" name="Text 16"/>
           <p:cNvSpPr/>
           <p:nvPr/>
         </p:nvSpPr>
@@ -3866,7 +3927,7 @@
       </p:sp>
       <p:pic>
         <p:nvPicPr>
-          <p:cNvPr id="18" name="Image 1" descr="/Users/pop7/Library/CloudStorage/OneDrive-MonsterConnectCo.,Ltd/Lecture/KOSEN69 - software-security/slides/pptx/assets/logo-small.png">    </p:cNvPr>
+          <p:cNvPr id="20" name="Image 1" descr="/Users/pop7/Library/CloudStorage/OneDrive-MonsterConnectCo.,Ltd/Lecture/KOSEN69 - software-security/slides/pptx/assets/logo-small.png">    </p:cNvPr>
           <p:cNvPicPr>
             <a:picLocks noChangeAspect="1"/>
           </p:cNvPicPr>

--- a/slides/pptx/week05.pptx
+++ b/slides/pptx/week05.pptx
@@ -3488,7 +3488,7 @@
                 <a:ea typeface="Calibri" pitchFamily="34" charset="-122"/>
                 <a:cs typeface="Calibri" pitchFamily="34" charset="-120"/>
               </a:rPr>
-              <a:t>📋 Worksheet 5 — labs/week05-xss-client-side/worksheet.md (Part 3) · kickoff: docker compose up → http://localhost:5000</a:t>
+              <a:t>📋 Worksheet 5 — labs/week05-xss-client-side/worksheet.md (Part 3) · kickoff: docker compose up → http://localhost:8080</a:t>
             </a:r>
             <a:endParaRPr lang="en-US" sz="1400" dirty="0"/>
           </a:p>
